--- a/assets/fiches/B10-fiche-1h30.pptx
+++ b/assets/fiches/B10-fiche-1h30.pptx
@@ -5765,7 +5765,7 @@
           <p:nvPr/>
         </p:nvGraphicFramePr>
         <p:xfrm>
-          <a:off x="-10000000" y="7868790"/>
+          <a:off x="533400" y="7868790"/>
           <a:ext cx="6457950" cy="1663063"/>
         </p:xfrm>
         <a:graphic>
@@ -6051,27 +6051,7 @@
                           <a:latin typeface="Arial"/>
                           <a:cs typeface="Arial"/>
                         </a:rPr>
-                        <a:t>15</a:t>
-                      </a:r>
-                      <a:r>
-                        <a:rPr sz="850" b="1" spc="-10" dirty="0">
-                          <a:solidFill>
-                            <a:srgbClr val="E67D21"/>
-                          </a:solidFill>
-                          <a:latin typeface="Arial"/>
-                          <a:cs typeface="Arial"/>
-                        </a:rPr>
-                        <a:t> </a:t>
-                      </a:r>
-                      <a:r>
-                        <a:rPr sz="850" b="1" spc="-25" dirty="0">
-                          <a:solidFill>
-                            <a:srgbClr val="E67D21"/>
-                          </a:solidFill>
-                          <a:latin typeface="Arial"/>
-                          <a:cs typeface="Arial"/>
-                        </a:rPr>
-                        <a:t>min</a:t>
+                        <a:t>2 min</a:t>
                       </a:r>
                       <a:endParaRPr sz="850">
                         <a:latin typeface="Arial"/>
@@ -6092,7 +6072,7 @@
                           <a:latin typeface="Arial"/>
                           <a:cs typeface="Arial"/>
                         </a:rPr>
-                        <a:t>Teleconsultation</a:t>
+                        <a:t>Chapitre 4 — Numérique responsable</a:t>
                       </a:r>
                       <a:endParaRPr sz="1050">
                         <a:latin typeface="Arial"/>
@@ -6121,140 +6101,17 @@
                         </a:rPr>
                         <a:t>OPT.</a:t>
                       </a:r>
-                      <a:r>
-                        <a:rPr sz="1200" b="1" baseline="13888" dirty="0">
-                          <a:solidFill>
-                            <a:srgbClr val="FFFFFF"/>
-                          </a:solidFill>
-                          <a:latin typeface="Arial"/>
-                          <a:cs typeface="Arial"/>
-                        </a:rPr>
-                        <a:t>	</a:t>
-                      </a:r>
-                      <a:r>
-                        <a:rPr sz="900" dirty="0">
-                          <a:solidFill>
-                            <a:srgbClr val="2B2B2B"/>
-                          </a:solidFill>
-                          <a:latin typeface="Arial"/>
-                          <a:cs typeface="Arial"/>
-                        </a:rPr>
-                        <a:t>.</a:t>
-                      </a:r>
-                      <a:r>
-                        <a:rPr sz="900" spc="-5" dirty="0">
-                          <a:solidFill>
-                            <a:srgbClr val="2B2B2B"/>
-                          </a:solidFill>
-                          <a:latin typeface="Arial"/>
-                          <a:cs typeface="Arial"/>
-                        </a:rPr>
-                        <a:t> </a:t>
-                      </a:r>
-                      <a:r>
-                        <a:rPr sz="900" dirty="0">
-                          <a:solidFill>
-                            <a:srgbClr val="2B2B2B"/>
-                          </a:solidFill>
-                          <a:latin typeface="Arial"/>
-                          <a:cs typeface="Arial"/>
-                        </a:rPr>
-                        <a:t>Expliquer</a:t>
-                      </a:r>
-                      <a:r>
-                        <a:rPr sz="900" spc="-5" dirty="0">
-                          <a:solidFill>
-                            <a:srgbClr val="2B2B2B"/>
-                          </a:solidFill>
-                          <a:latin typeface="Arial"/>
-                          <a:cs typeface="Arial"/>
-                        </a:rPr>
-                        <a:t> </a:t>
-                      </a:r>
-                      <a:r>
-                        <a:rPr sz="900" dirty="0">
-                          <a:solidFill>
-                            <a:srgbClr val="2B2B2B"/>
-                          </a:solidFill>
-                          <a:latin typeface="Arial"/>
-                          <a:cs typeface="Arial"/>
-                        </a:rPr>
-                        <a:t>ce qu'est</a:t>
-                      </a:r>
-                      <a:r>
-                        <a:rPr sz="900" spc="-5" dirty="0">
-                          <a:solidFill>
-                            <a:srgbClr val="2B2B2B"/>
-                          </a:solidFill>
-                          <a:latin typeface="Arial"/>
-                          <a:cs typeface="Arial"/>
-                        </a:rPr>
-                        <a:t> </a:t>
-                      </a:r>
-                      <a:r>
-                        <a:rPr sz="900" dirty="0">
-                          <a:solidFill>
-                            <a:srgbClr val="2B2B2B"/>
-                          </a:solidFill>
-                          <a:latin typeface="Arial"/>
-                          <a:cs typeface="Arial"/>
-                        </a:rPr>
-                        <a:t>la teleconsultation</a:t>
-                      </a:r>
-                      <a:r>
-                        <a:rPr sz="900" spc="-5" dirty="0">
-                          <a:solidFill>
-                            <a:srgbClr val="2B2B2B"/>
-                          </a:solidFill>
-                          <a:latin typeface="Arial"/>
-                          <a:cs typeface="Arial"/>
-                        </a:rPr>
-                        <a:t> </a:t>
-                      </a:r>
-                      <a:r>
-                        <a:rPr sz="900" dirty="0">
-                          <a:solidFill>
-                            <a:srgbClr val="2B2B2B"/>
-                          </a:solidFill>
-                          <a:latin typeface="Arial"/>
-                          <a:cs typeface="Arial"/>
-                        </a:rPr>
-                        <a:t>et</a:t>
-                      </a:r>
-                      <a:r>
-                        <a:rPr sz="900" spc="-5" dirty="0">
-                          <a:solidFill>
-                            <a:srgbClr val="2B2B2B"/>
-                          </a:solidFill>
-                          <a:latin typeface="Arial"/>
-                          <a:cs typeface="Arial"/>
-                        </a:rPr>
-                        <a:t> </a:t>
-                      </a:r>
-                      <a:r>
-                        <a:rPr sz="900" dirty="0">
-                          <a:solidFill>
-                            <a:srgbClr val="2B2B2B"/>
-                          </a:solidFill>
-                          <a:latin typeface="Arial"/>
-                          <a:cs typeface="Arial"/>
-                        </a:rPr>
-                        <a:t>son </a:t>
-                      </a:r>
-                      <a:r>
-                        <a:rPr sz="900" spc="-10" dirty="0">
-                          <a:solidFill>
-                            <a:srgbClr val="2B2B2B"/>
-                          </a:solidFill>
-                          <a:latin typeface="Arial"/>
-                          <a:cs typeface="Arial"/>
-                        </a:rPr>
-                        <a:t>remboursement</a:t>
-                      </a:r>
                       <a:endParaRPr sz="900">
                         <a:latin typeface="Arial"/>
                         <a:cs typeface="Arial"/>
                       </a:endParaRPr>
+                      <a:r>
+                        <a:rPr sz="900" spc="-30" baseline="13888" dirty="0">
+                          <a:latin typeface="Arial"/>
+                          <a:cs typeface="Arial"/>
+                        </a:rPr>
+                        <a:t>	. Quel est l'impact environnemental du numérique médical ?</a:t>
+                      </a:r>
                     </a:p>
                     <a:p>
                       <a:pPr marL="755650">
@@ -6270,17 +6127,7 @@
                           <a:latin typeface="Arial"/>
                           <a:cs typeface="Arial"/>
                         </a:rPr>
-                        <a:t>. Montrer comment reperer un medecin proposant la </a:t>
-                      </a:r>
-                      <a:r>
-                        <a:rPr sz="900" spc="-10" dirty="0">
-                          <a:solidFill>
-                            <a:srgbClr val="2B2B2B"/>
-                          </a:solidFill>
-                          <a:latin typeface="Arial"/>
-                          <a:cs typeface="Arial"/>
-                        </a:rPr>
-                        <a:t>video</a:t>
+                        <a:t>. Le numérique n'est pas neutre pour la planète. Un data center, une connexio…</a:t>
                       </a:r>
                       <a:endParaRPr sz="900">
                         <a:latin typeface="Arial"/>
@@ -6301,17 +6148,7 @@
                           <a:latin typeface="Arial"/>
                           <a:cs typeface="Arial"/>
                         </a:rPr>
-                        <a:t>. Simuler la reception du lien et le demarrage de la </a:t>
-                      </a:r>
-                      <a:r>
-                        <a:rPr sz="900" spc="-10" dirty="0">
-                          <a:solidFill>
-                            <a:srgbClr val="2B2B2B"/>
-                          </a:solidFill>
-                          <a:latin typeface="Arial"/>
-                          <a:cs typeface="Arial"/>
-                        </a:rPr>
-                        <a:t>session</a:t>
+                        <a:t>. Un trajet évité = gros gain</a:t>
                       </a:r>
                       <a:endParaRPr sz="900">
                         <a:latin typeface="Arial"/>
@@ -6366,36 +6203,6 @@
                           <a:spcPts val="250"/>
                         </a:spcBef>
                       </a:pPr>
-                      <a:r>
-                        <a:rPr sz="850" b="1" dirty="0">
-                          <a:solidFill>
-                            <a:srgbClr val="E67D21"/>
-                          </a:solidFill>
-                          <a:latin typeface="Arial"/>
-                          <a:cs typeface="Arial"/>
-                        </a:rPr>
-                        <a:t>10</a:t>
-                      </a:r>
-                      <a:r>
-                        <a:rPr sz="850" b="1" spc="-10" dirty="0">
-                          <a:solidFill>
-                            <a:srgbClr val="E67D21"/>
-                          </a:solidFill>
-                          <a:latin typeface="Arial"/>
-                          <a:cs typeface="Arial"/>
-                        </a:rPr>
-                        <a:t> </a:t>
-                      </a:r>
-                      <a:r>
-                        <a:rPr sz="850" b="1" spc="-25" dirty="0">
-                          <a:solidFill>
-                            <a:srgbClr val="E67D21"/>
-                          </a:solidFill>
-                          <a:latin typeface="Arial"/>
-                          <a:cs typeface="Arial"/>
-                        </a:rPr>
-                        <a:t>min</a:t>
-                      </a:r>
                       <a:endParaRPr sz="850">
                         <a:latin typeface="Arial"/>
                         <a:cs typeface="Arial"/>
@@ -6407,76 +6214,6 @@
                           <a:spcPts val="1200"/>
                         </a:lnSpc>
                       </a:pPr>
-                      <a:r>
-                        <a:rPr sz="1050" b="1" dirty="0">
-                          <a:solidFill>
-                            <a:srgbClr val="2B2B2B"/>
-                          </a:solidFill>
-                          <a:latin typeface="Arial"/>
-                          <a:cs typeface="Arial"/>
-                        </a:rPr>
-                        <a:t>Acceder</a:t>
-                      </a:r>
-                      <a:r>
-                        <a:rPr sz="1050" b="1" spc="-25" dirty="0">
-                          <a:solidFill>
-                            <a:srgbClr val="2B2B2B"/>
-                          </a:solidFill>
-                          <a:latin typeface="Arial"/>
-                          <a:cs typeface="Arial"/>
-                        </a:rPr>
-                        <a:t> </a:t>
-                      </a:r>
-                      <a:r>
-                        <a:rPr sz="1050" b="1" dirty="0">
-                          <a:solidFill>
-                            <a:srgbClr val="2B2B2B"/>
-                          </a:solidFill>
-                          <a:latin typeface="Arial"/>
-                          <a:cs typeface="Arial"/>
-                        </a:rPr>
-                        <a:t>a</a:t>
-                      </a:r>
-                      <a:r>
-                        <a:rPr sz="1050" b="1" spc="-25" dirty="0">
-                          <a:solidFill>
-                            <a:srgbClr val="2B2B2B"/>
-                          </a:solidFill>
-                          <a:latin typeface="Arial"/>
-                          <a:cs typeface="Arial"/>
-                        </a:rPr>
-                        <a:t> </a:t>
-                      </a:r>
-                      <a:r>
-                        <a:rPr sz="1050" b="1" dirty="0">
-                          <a:solidFill>
-                            <a:srgbClr val="2B2B2B"/>
-                          </a:solidFill>
-                          <a:latin typeface="Arial"/>
-                          <a:cs typeface="Arial"/>
-                        </a:rPr>
-                        <a:t>mes</a:t>
-                      </a:r>
-                      <a:r>
-                        <a:rPr sz="1050" b="1" spc="-20" dirty="0">
-                          <a:solidFill>
-                            <a:srgbClr val="2B2B2B"/>
-                          </a:solidFill>
-                          <a:latin typeface="Arial"/>
-                          <a:cs typeface="Arial"/>
-                        </a:rPr>
-                        <a:t> </a:t>
-                      </a:r>
-                      <a:r>
-                        <a:rPr sz="1050" b="1" spc="-10" dirty="0">
-                          <a:solidFill>
-                            <a:srgbClr val="2B2B2B"/>
-                          </a:solidFill>
-                          <a:latin typeface="Arial"/>
-                          <a:cs typeface="Arial"/>
-                        </a:rPr>
-                        <a:t>documents</a:t>
-                      </a:r>
                       <a:endParaRPr sz="1050">
                         <a:latin typeface="Arial"/>
                         <a:cs typeface="Arial"/>
@@ -6494,46 +6231,6 @@
                           <a:tab pos="524510" algn="l"/>
                         </a:tabLst>
                       </a:pPr>
-                      <a:r>
-                        <a:rPr sz="1200" b="1" spc="-30" baseline="13888" dirty="0">
-                          <a:solidFill>
-                            <a:srgbClr val="FFFFFF"/>
-                          </a:solidFill>
-                          <a:latin typeface="Arial"/>
-                          <a:cs typeface="Arial"/>
-                        </a:rPr>
-                        <a:t>OPT.</a:t>
-                      </a:r>
-                      <a:r>
-                        <a:rPr sz="1200" b="1" baseline="13888" dirty="0">
-                          <a:solidFill>
-                            <a:srgbClr val="FFFFFF"/>
-                          </a:solidFill>
-                          <a:latin typeface="Arial"/>
-                          <a:cs typeface="Arial"/>
-                        </a:rPr>
-                        <a:t>	</a:t>
-                      </a:r>
-                      <a:r>
-                        <a:rPr sz="900" dirty="0">
-                          <a:solidFill>
-                            <a:srgbClr val="2B2B2B"/>
-                          </a:solidFill>
-                          <a:latin typeface="Arial"/>
-                          <a:cs typeface="Arial"/>
-                        </a:rPr>
-                        <a:t>. Naviguer vers Mon espace sante &gt; Mes </a:t>
-                      </a:r>
-                      <a:r>
-                        <a:rPr sz="900" spc="-10" dirty="0">
-                          <a:solidFill>
-                            <a:srgbClr val="2B2B2B"/>
-                          </a:solidFill>
-                          <a:latin typeface="Arial"/>
-                          <a:cs typeface="Arial"/>
-                        </a:rPr>
-                        <a:t>documents</a:t>
-                      </a:r>
                       <a:endParaRPr sz="900">
                         <a:latin typeface="Arial"/>
                         <a:cs typeface="Arial"/>
@@ -6545,26 +6242,6 @@
                           <a:spcPts val="1050"/>
                         </a:lnSpc>
                       </a:pPr>
-                      <a:r>
-                        <a:rPr sz="900" dirty="0">
-                          <a:solidFill>
-                            <a:srgbClr val="2B2B2B"/>
-                          </a:solidFill>
-                          <a:latin typeface="Arial"/>
-                          <a:cs typeface="Arial"/>
-                        </a:rPr>
-                        <a:t>. Retrouver une ordonnance ou un resultat </a:t>
-                      </a:r>
-                      <a:r>
-                        <a:rPr sz="900" spc="-10" dirty="0">
-                          <a:solidFill>
-                            <a:srgbClr val="2B2B2B"/>
-                          </a:solidFill>
-                          <a:latin typeface="Arial"/>
-                          <a:cs typeface="Arial"/>
-                        </a:rPr>
-                        <a:t>d'analyse</a:t>
-                      </a:r>
                       <a:endParaRPr sz="900">
                         <a:latin typeface="Arial"/>
                         <a:cs typeface="Arial"/>
@@ -6576,26 +6253,6 @@
                           <a:spcPts val="885"/>
                         </a:lnSpc>
                       </a:pPr>
-                      <a:r>
-                        <a:rPr sz="900" dirty="0">
-                          <a:solidFill>
-                            <a:srgbClr val="2B2B2B"/>
-                          </a:solidFill>
-                          <a:latin typeface="Arial"/>
-                          <a:cs typeface="Arial"/>
-                        </a:rPr>
-                        <a:t>. Telecharger ou imprimer un document depuis </a:t>
-                      </a:r>
-                      <a:r>
-                        <a:rPr sz="900" spc="-10" dirty="0">
-                          <a:solidFill>
-                            <a:srgbClr val="2B2B2B"/>
-                          </a:solidFill>
-                          <a:latin typeface="Arial"/>
-                          <a:cs typeface="Arial"/>
-                        </a:rPr>
-                        <a:t>Doctolib</a:t>
-                      </a:r>
                       <a:endParaRPr sz="900">
                         <a:latin typeface="Arial"/>
                         <a:cs typeface="Arial"/>

--- a/assets/fiches/B10-fiche-1h30.pptx
+++ b/assets/fiches/B10-fiche-1h30.pptx
@@ -6479,7 +6479,7 @@
         <p:spPr>
           <a:xfrm>
             <a:off x="529200" y="2876400"/>
-            <a:ext cx="6498000" cy="828000"/>
+            <a:ext cx="6498000" cy="1065600"/>
           </a:xfrm>
           <a:prstGeom prst="rect">
             <a:avLst/>
@@ -6646,7 +6646,7 @@
         <p:spPr>
           <a:xfrm>
             <a:off x="637200" y="3117600"/>
-            <a:ext cx="6300000" cy="529200"/>
+            <a:ext cx="6300000" cy="766800"/>
           </a:xfrm>
           <a:prstGeom prst="rect">
             <a:avLst/>

--- a/assets/fiches/B10-fiche-1h30.pptx
+++ b/assets/fiches/B10-fiche-1h30.pptx
@@ -6479,7 +6479,7 @@
         <p:spPr>
           <a:xfrm>
             <a:off x="529200" y="2876400"/>
-            <a:ext cx="6498000" cy="1065600"/>
+            <a:ext cx="6498000" cy="1897199"/>
           </a:xfrm>
           <a:prstGeom prst="rect">
             <a:avLst/>
@@ -6772,6 +6772,174 @@
         </p:nvSpPr>
         <p:spPr>
           <a:xfrm>
+            <a:off x="529200" y="3906000"/>
+            <a:ext cx="6498000" cy="14400"/>
+          </a:xfrm>
+          <a:prstGeom prst="rect">
+            <a:avLst/>
+          </a:prstGeom>
+          <a:solidFill>
+            <a:srgbClr val="E67D21"/>
+          </a:solidFill>
+          <a:ln>
+            <a:noFill/>
+          </a:ln>
+        </p:spPr>
+        <p:style>
+          <a:lnRef idx="1">
+            <a:schemeClr val="accent1"/>
+          </a:lnRef>
+          <a:fillRef idx="3">
+            <a:schemeClr val="accent1"/>
+          </a:fillRef>
+          <a:effectRef idx="2">
+            <a:schemeClr val="accent1"/>
+          </a:effectRef>
+          <a:fontRef idx="minor">
+            <a:schemeClr val="lt1"/>
+          </a:fontRef>
+        </p:style>
+        <p:txBody>
+          <a:bodyPr rtlCol="0" anchor="ctr"/>
+          <a:lstStyle/>
+          <a:p/>
+        </p:txBody>
+      </p:sp>
+      <p:sp>
+        <p:nvSpPr>
+          <p:cNvPr id="23" name="TextBox 22"/>
+          <p:cNvSpPr txBox="1"/>
+          <p:nvPr/>
+        </p:nvSpPr>
+        <p:spPr>
+          <a:xfrm>
+            <a:off x="637200" y="3949200"/>
+            <a:ext cx="6300000" cy="766800"/>
+          </a:xfrm>
+          <a:prstGeom prst="rect">
+            <a:avLst/>
+          </a:prstGeom>
+          <a:noFill/>
+        </p:spPr>
+        <p:txBody>
+          <a:bodyPr wrap="square" tIns="0" bIns="0" lIns="18000" rIns="18000">
+            <a:spAutoFit/>
+          </a:bodyPr>
+          <a:lstStyle/>
+          <a:p>
+            <a:pPr algn="l">
+              <a:spcBef>
+                <a:spcPts val="0"/>
+              </a:spcBef>
+              <a:spcAft>
+                <a:spcPts val="100"/>
+              </a:spcAft>
+            </a:pPr>
+            <a:r>
+              <a:rPr sz="800" b="1" i="0">
+                <a:solidFill>
+                  <a:srgbClr val="E67D21"/>
+                </a:solidFill>
+                <a:latin typeface="Arial"/>
+              </a:rPr>
+              <a:t>5 min</a:t>
+            </a:r>
+          </a:p>
+          <a:p>
+            <a:pPr algn="l">
+              <a:spcBef>
+                <a:spcPts val="0"/>
+              </a:spcBef>
+              <a:spcAft>
+                <a:spcPts val="100"/>
+              </a:spcAft>
+            </a:pPr>
+            <a:r>
+              <a:rPr sz="900" b="1" i="0">
+                <a:solidFill>
+                  <a:srgbClr val="2B2B2B"/>
+                </a:solidFill>
+                <a:latin typeface="Arial"/>
+              </a:rPr>
+              <a:t>Pour aller plus loin</a:t>
+            </a:r>
+          </a:p>
+          <a:p>
+            <a:pPr>
+              <a:spcBef>
+                <a:spcPts val="0"/>
+              </a:spcBef>
+              <a:spcAft>
+                <a:spcPts val="100"/>
+              </a:spcAft>
+            </a:pPr>
+            <a:r>
+              <a:rPr sz="800" b="1">
+                <a:solidFill>
+                  <a:srgbClr val="E67D21"/>
+                </a:solidFill>
+                <a:latin typeface="Arial"/>
+              </a:rPr>
+              <a:t>OPT.  </a:t>
+            </a:r>
+            <a:r>
+              <a:rPr sz="800">
+                <a:solidFill>
+                  <a:srgbClr val="2B2B2B"/>
+                </a:solidFill>
+                <a:latin typeface="Arial"/>
+              </a:rPr>
+              <a:t>. Ce que vous pouvez faire dès aujourd'hui</a:t>
+            </a:r>
+          </a:p>
+          <a:p>
+            <a:pPr algn="l">
+              <a:spcBef>
+                <a:spcPts val="0"/>
+              </a:spcBef>
+              <a:spcAft>
+                <a:spcPts val="100"/>
+              </a:spcAft>
+            </a:pPr>
+            <a:r>
+              <a:rPr sz="800" b="0" i="0">
+                <a:solidFill>
+                  <a:srgbClr val="2B2B2B"/>
+                </a:solidFill>
+                <a:latin typeface="Arial"/>
+              </a:rPr>
+              <a:t>. Vous avez maintenant toutes les clés pour utiliser Doctolib sereinement. Vo…</a:t>
+            </a:r>
+          </a:p>
+          <a:p>
+            <a:pPr algn="l">
+              <a:spcBef>
+                <a:spcPts val="0"/>
+              </a:spcBef>
+              <a:spcAft>
+                <a:spcPts val="100"/>
+              </a:spcAft>
+            </a:pPr>
+            <a:r>
+              <a:rPr sz="800" b="0" i="0">
+                <a:solidFill>
+                  <a:srgbClr val="2B2B2B"/>
+                </a:solidFill>
+                <a:latin typeface="Arial"/>
+              </a:rPr>
+              <a:t>. 1. Créez votre compte</a:t>
+            </a:r>
+          </a:p>
+        </p:txBody>
+      </p:sp>
+      <p:sp>
+        <p:nvSpPr>
+          <p:cNvPr id="24" name="Rectangle 23"/>
+          <p:cNvSpPr/>
+          <p:nvPr/>
+        </p:nvSpPr>
+        <p:spPr>
+          <a:xfrm>
             <a:off x="529200" y="9684000"/>
             <a:ext cx="6498000" cy="43200"/>
           </a:xfrm>
@@ -6807,7 +6975,7 @@
       </p:sp>
       <p:sp>
         <p:nvSpPr>
-          <p:cNvPr id="23" name="TextBox 22"/>
+          <p:cNvPr id="25" name="TextBox 24"/>
           <p:cNvSpPr txBox="1"/>
           <p:nvPr/>
         </p:nvSpPr>

--- a/assets/fiches/B10-fiche-1h30.pptx
+++ b/assets/fiches/B10-fiche-1h30.pptx
@@ -6740,7 +6740,7 @@
                 </a:solidFill>
                 <a:latin typeface="Arial"/>
               </a:rPr>
-              <a:t>. Le numérique n'est pas neutre pour la planète. Un data center, une connexio…</a:t>
+              <a:t>. Le numérique n'est pas neutre pour la planète. Un data center, une connexion internet, un smartphone — tout cela consomme de l'énergie. Mais comparé aux déplacements en voiture qu'il évite, le bilan peut être très favorable.</a:t>
             </a:r>
           </a:p>
           <a:p>
@@ -6908,7 +6908,7 @@
                 </a:solidFill>
                 <a:latin typeface="Arial"/>
               </a:rPr>
-              <a:t>. Vous avez maintenant toutes les clés pour utiliser Doctolib sereinement. Vo…</a:t>
+              <a:t>. Vous avez maintenant toutes les clés pour utiliser Doctolib sereinement. Voici comment passer à l'action dès la fin de cet atelier :</a:t>
             </a:r>
           </a:p>
           <a:p>

--- a/assets/fiches/B10-fiche-1h30.pptx
+++ b/assets/fiches/B10-fiche-1h30.pptx
@@ -3097,9 +3097,35 @@
         <p:nvPr/>
       </p:nvGrpSpPr>
       <p:grpSpPr/>
-      <p:sp>
-        <p:nvSpPr>
-          <p:cNvPr id="2" name="TextBox 1"/>
+      <p:pic>
+        <p:nvPicPr>
+          <p:cNvPr id="2" name="Picture 1" descr="bg-p1.png"/>
+          <p:cNvPicPr>
+            <a:picLocks noChangeAspect="1"/>
+          </p:cNvPicPr>
+          <p:nvPr/>
+        </p:nvPicPr>
+        <p:blipFill>
+          <a:blip r:embed="rId2">
+            <a:alphaModFix amt="80000"/>
+          </a:blip>
+          <a:stretch>
+            <a:fillRect/>
+          </a:stretch>
+        </p:blipFill>
+        <p:spPr>
+          <a:xfrm>
+            <a:off x="0" y="0"/>
+            <a:ext cx="7556399" cy="10692000"/>
+          </a:xfrm>
+          <a:prstGeom prst="rect">
+            <a:avLst/>
+          </a:prstGeom>
+        </p:spPr>
+      </p:pic>
+      <p:sp>
+        <p:nvSpPr>
+          <p:cNvPr id="3" name="TextBox 2"/>
           <p:cNvSpPr txBox="1"/>
           <p:nvPr/>
         </p:nvSpPr>
@@ -3160,7 +3186,7 @@
       </p:sp>
       <p:sp>
         <p:nvSpPr>
-          <p:cNvPr id="3" name="Rectangle 2"/>
+          <p:cNvPr id="4" name="Rectangle 3"/>
           <p:cNvSpPr/>
           <p:nvPr/>
         </p:nvSpPr>
@@ -3203,7 +3229,7 @@
       </p:sp>
       <p:sp>
         <p:nvSpPr>
-          <p:cNvPr id="4" name="TextBox 3"/>
+          <p:cNvPr id="5" name="TextBox 4"/>
           <p:cNvSpPr txBox="1"/>
           <p:nvPr/>
         </p:nvSpPr>
@@ -3321,7 +3347,7 @@
       </p:sp>
       <p:sp>
         <p:nvSpPr>
-          <p:cNvPr id="5" name="Rectangle 4"/>
+          <p:cNvPr id="6" name="Rectangle 5"/>
           <p:cNvSpPr/>
           <p:nvPr/>
         </p:nvSpPr>
@@ -3364,7 +3390,7 @@
       </p:sp>
       <p:sp>
         <p:nvSpPr>
-          <p:cNvPr id="6" name="TextBox 5"/>
+          <p:cNvPr id="7" name="TextBox 6"/>
           <p:cNvSpPr txBox="1"/>
           <p:nvPr/>
         </p:nvSpPr>
@@ -3482,7 +3508,7 @@
       </p:sp>
       <p:sp>
         <p:nvSpPr>
-          <p:cNvPr id="7" name="Rectangle 6"/>
+          <p:cNvPr id="8" name="Rectangle 7"/>
           <p:cNvSpPr/>
           <p:nvPr/>
         </p:nvSpPr>
@@ -3525,7 +3551,7 @@
       </p:sp>
       <p:sp>
         <p:nvSpPr>
-          <p:cNvPr id="8" name="Rectangle 7"/>
+          <p:cNvPr id="9" name="Rectangle 8"/>
           <p:cNvSpPr/>
           <p:nvPr/>
         </p:nvSpPr>
@@ -3566,7 +3592,7 @@
       </p:sp>
       <p:sp>
         <p:nvSpPr>
-          <p:cNvPr id="9" name="Rectangle 8"/>
+          <p:cNvPr id="10" name="Rectangle 9"/>
           <p:cNvSpPr/>
           <p:nvPr/>
         </p:nvSpPr>
@@ -3607,7 +3633,7 @@
       </p:sp>
       <p:sp>
         <p:nvSpPr>
-          <p:cNvPr id="10" name="TextBox 9"/>
+          <p:cNvPr id="11" name="TextBox 10"/>
           <p:cNvSpPr txBox="1"/>
           <p:nvPr/>
         </p:nvSpPr>
@@ -3649,7 +3675,7 @@
       </p:sp>
       <p:sp>
         <p:nvSpPr>
-          <p:cNvPr id="11" name="TextBox 10"/>
+          <p:cNvPr id="12" name="TextBox 11"/>
           <p:cNvSpPr txBox="1"/>
           <p:nvPr/>
         </p:nvSpPr>
@@ -3729,7 +3755,7 @@
       </p:sp>
       <p:sp>
         <p:nvSpPr>
-          <p:cNvPr id="12" name="Rectangle 11"/>
+          <p:cNvPr id="13" name="Rectangle 12"/>
           <p:cNvSpPr/>
           <p:nvPr/>
         </p:nvSpPr>
@@ -3772,7 +3798,7 @@
       </p:sp>
       <p:sp>
         <p:nvSpPr>
-          <p:cNvPr id="13" name="Rectangle 12"/>
+          <p:cNvPr id="14" name="Rectangle 13"/>
           <p:cNvSpPr/>
           <p:nvPr/>
         </p:nvSpPr>
@@ -3813,7 +3839,7 @@
       </p:sp>
       <p:sp>
         <p:nvSpPr>
-          <p:cNvPr id="14" name="Rectangle 13"/>
+          <p:cNvPr id="15" name="Rectangle 14"/>
           <p:cNvSpPr/>
           <p:nvPr/>
         </p:nvSpPr>
@@ -3854,7 +3880,7 @@
       </p:sp>
       <p:sp>
         <p:nvSpPr>
-          <p:cNvPr id="15" name="TextBox 14"/>
+          <p:cNvPr id="16" name="TextBox 15"/>
           <p:cNvSpPr txBox="1"/>
           <p:nvPr/>
         </p:nvSpPr>
@@ -3896,7 +3922,7 @@
       </p:sp>
       <p:sp>
         <p:nvSpPr>
-          <p:cNvPr id="16" name="TextBox 15"/>
+          <p:cNvPr id="17" name="TextBox 16"/>
           <p:cNvSpPr txBox="1"/>
           <p:nvPr/>
         </p:nvSpPr>
@@ -3976,7 +4002,7 @@
       </p:sp>
       <p:sp>
         <p:nvSpPr>
-          <p:cNvPr id="17" name="Rectangle 16"/>
+          <p:cNvPr id="18" name="Rectangle 17"/>
           <p:cNvSpPr/>
           <p:nvPr/>
         </p:nvSpPr>
@@ -4019,7 +4045,7 @@
       </p:sp>
       <p:sp>
         <p:nvSpPr>
-          <p:cNvPr id="18" name="Rectangle 17"/>
+          <p:cNvPr id="19" name="Rectangle 18"/>
           <p:cNvSpPr/>
           <p:nvPr/>
         </p:nvSpPr>
@@ -4060,7 +4086,7 @@
       </p:sp>
       <p:sp>
         <p:nvSpPr>
-          <p:cNvPr id="19" name="Rectangle 18"/>
+          <p:cNvPr id="20" name="Rectangle 19"/>
           <p:cNvSpPr/>
           <p:nvPr/>
         </p:nvSpPr>
@@ -4101,7 +4127,7 @@
       </p:sp>
       <p:sp>
         <p:nvSpPr>
-          <p:cNvPr id="20" name="TextBox 19"/>
+          <p:cNvPr id="21" name="TextBox 20"/>
           <p:cNvSpPr txBox="1"/>
           <p:nvPr/>
         </p:nvSpPr>
@@ -4143,7 +4169,7 @@
       </p:sp>
       <p:sp>
         <p:nvSpPr>
-          <p:cNvPr id="21" name="TextBox 20"/>
+          <p:cNvPr id="22" name="TextBox 21"/>
           <p:cNvSpPr txBox="1"/>
           <p:nvPr/>
         </p:nvSpPr>
@@ -4223,7 +4249,7 @@
       </p:sp>
       <p:sp>
         <p:nvSpPr>
-          <p:cNvPr id="22" name="Rectangle 21"/>
+          <p:cNvPr id="23" name="Rectangle 22"/>
           <p:cNvSpPr/>
           <p:nvPr/>
         </p:nvSpPr>
@@ -4266,7 +4292,7 @@
       </p:sp>
       <p:sp>
         <p:nvSpPr>
-          <p:cNvPr id="23" name="Rectangle 22"/>
+          <p:cNvPr id="24" name="Rectangle 23"/>
           <p:cNvSpPr/>
           <p:nvPr/>
         </p:nvSpPr>
@@ -4307,7 +4333,7 @@
       </p:sp>
       <p:sp>
         <p:nvSpPr>
-          <p:cNvPr id="24" name="Rectangle 23"/>
+          <p:cNvPr id="25" name="Rectangle 24"/>
           <p:cNvSpPr/>
           <p:nvPr/>
         </p:nvSpPr>
@@ -4348,7 +4374,7 @@
       </p:sp>
       <p:sp>
         <p:nvSpPr>
-          <p:cNvPr id="25" name="TextBox 24"/>
+          <p:cNvPr id="26" name="TextBox 25"/>
           <p:cNvSpPr txBox="1"/>
           <p:nvPr/>
         </p:nvSpPr>
@@ -4390,7 +4416,7 @@
       </p:sp>
       <p:sp>
         <p:nvSpPr>
-          <p:cNvPr id="26" name="TextBox 25"/>
+          <p:cNvPr id="27" name="TextBox 26"/>
           <p:cNvSpPr txBox="1"/>
           <p:nvPr/>
         </p:nvSpPr>
@@ -4470,7 +4496,7 @@
       </p:sp>
       <p:sp>
         <p:nvSpPr>
-          <p:cNvPr id="27" name="Rectangle 26"/>
+          <p:cNvPr id="28" name="Rectangle 27"/>
           <p:cNvSpPr/>
           <p:nvPr/>
         </p:nvSpPr>
@@ -4513,7 +4539,7 @@
       </p:sp>
       <p:sp>
         <p:nvSpPr>
-          <p:cNvPr id="28" name="Rectangle 27"/>
+          <p:cNvPr id="29" name="Rectangle 28"/>
           <p:cNvSpPr/>
           <p:nvPr/>
         </p:nvSpPr>
@@ -4554,7 +4580,7 @@
       </p:sp>
       <p:sp>
         <p:nvSpPr>
-          <p:cNvPr id="29" name="Rectangle 28"/>
+          <p:cNvPr id="30" name="Rectangle 29"/>
           <p:cNvSpPr/>
           <p:nvPr/>
         </p:nvSpPr>
@@ -4595,7 +4621,7 @@
       </p:sp>
       <p:sp>
         <p:nvSpPr>
-          <p:cNvPr id="30" name="TextBox 29"/>
+          <p:cNvPr id="31" name="TextBox 30"/>
           <p:cNvSpPr txBox="1"/>
           <p:nvPr/>
         </p:nvSpPr>
@@ -4637,7 +4663,7 @@
       </p:sp>
       <p:sp>
         <p:nvSpPr>
-          <p:cNvPr id="31" name="TextBox 30"/>
+          <p:cNvPr id="32" name="TextBox 31"/>
           <p:cNvSpPr txBox="1"/>
           <p:nvPr/>
         </p:nvSpPr>
@@ -4717,7 +4743,7 @@
       </p:sp>
       <p:sp>
         <p:nvSpPr>
-          <p:cNvPr id="32" name="Rectangle 31"/>
+          <p:cNvPr id="33" name="Rectangle 32"/>
           <p:cNvSpPr/>
           <p:nvPr/>
         </p:nvSpPr>
@@ -4760,7 +4786,7 @@
       </p:sp>
       <p:sp>
         <p:nvSpPr>
-          <p:cNvPr id="33" name="Rectangle 32"/>
+          <p:cNvPr id="34" name="Rectangle 33"/>
           <p:cNvSpPr/>
           <p:nvPr/>
         </p:nvSpPr>
@@ -4801,7 +4827,7 @@
       </p:sp>
       <p:sp>
         <p:nvSpPr>
-          <p:cNvPr id="34" name="Rectangle 33"/>
+          <p:cNvPr id="35" name="Rectangle 34"/>
           <p:cNvSpPr/>
           <p:nvPr/>
         </p:nvSpPr>
@@ -4842,7 +4868,7 @@
       </p:sp>
       <p:sp>
         <p:nvSpPr>
-          <p:cNvPr id="35" name="TextBox 34"/>
+          <p:cNvPr id="36" name="TextBox 35"/>
           <p:cNvSpPr txBox="1"/>
           <p:nvPr/>
         </p:nvSpPr>
@@ -4884,7 +4910,7 @@
       </p:sp>
       <p:sp>
         <p:nvSpPr>
-          <p:cNvPr id="36" name="TextBox 35"/>
+          <p:cNvPr id="37" name="TextBox 36"/>
           <p:cNvSpPr txBox="1"/>
           <p:nvPr/>
         </p:nvSpPr>
@@ -4964,7 +4990,7 @@
       </p:sp>
       <p:sp>
         <p:nvSpPr>
-          <p:cNvPr id="37" name="Rectangle 36"/>
+          <p:cNvPr id="38" name="Rectangle 37"/>
           <p:cNvSpPr/>
           <p:nvPr/>
         </p:nvSpPr>
@@ -5007,7 +5033,7 @@
       </p:sp>
       <p:sp>
         <p:nvSpPr>
-          <p:cNvPr id="38" name="Rectangle 37"/>
+          <p:cNvPr id="39" name="Rectangle 38"/>
           <p:cNvSpPr/>
           <p:nvPr/>
         </p:nvSpPr>
@@ -5048,7 +5074,7 @@
       </p:sp>
       <p:sp>
         <p:nvSpPr>
-          <p:cNvPr id="39" name="Rectangle 38"/>
+          <p:cNvPr id="40" name="Rectangle 39"/>
           <p:cNvSpPr/>
           <p:nvPr/>
         </p:nvSpPr>
@@ -5089,7 +5115,7 @@
       </p:sp>
       <p:sp>
         <p:nvSpPr>
-          <p:cNvPr id="40" name="TextBox 39"/>
+          <p:cNvPr id="41" name="TextBox 40"/>
           <p:cNvSpPr txBox="1"/>
           <p:nvPr/>
         </p:nvSpPr>
@@ -5131,7 +5157,7 @@
       </p:sp>
       <p:sp>
         <p:nvSpPr>
-          <p:cNvPr id="41" name="TextBox 40"/>
+          <p:cNvPr id="42" name="TextBox 41"/>
           <p:cNvSpPr txBox="1"/>
           <p:nvPr/>
         </p:nvSpPr>
@@ -5211,7 +5237,7 @@
       </p:sp>
       <p:sp>
         <p:nvSpPr>
-          <p:cNvPr id="42" name="Rectangle 41"/>
+          <p:cNvPr id="43" name="Rectangle 42"/>
           <p:cNvSpPr/>
           <p:nvPr/>
         </p:nvSpPr>
@@ -5254,7 +5280,7 @@
       </p:sp>
       <p:sp>
         <p:nvSpPr>
-          <p:cNvPr id="43" name="Rectangle 42"/>
+          <p:cNvPr id="44" name="Rectangle 43"/>
           <p:cNvSpPr/>
           <p:nvPr/>
         </p:nvSpPr>
@@ -5295,7 +5321,7 @@
       </p:sp>
       <p:sp>
         <p:nvSpPr>
-          <p:cNvPr id="44" name="Rectangle 43"/>
+          <p:cNvPr id="45" name="Rectangle 44"/>
           <p:cNvSpPr/>
           <p:nvPr/>
         </p:nvSpPr>
@@ -5336,7 +5362,7 @@
       </p:sp>
       <p:sp>
         <p:nvSpPr>
-          <p:cNvPr id="45" name="TextBox 44"/>
+          <p:cNvPr id="46" name="TextBox 45"/>
           <p:cNvSpPr txBox="1"/>
           <p:nvPr/>
         </p:nvSpPr>
@@ -5378,7 +5404,7 @@
       </p:sp>
       <p:sp>
         <p:nvSpPr>
-          <p:cNvPr id="46" name="TextBox 45"/>
+          <p:cNvPr id="47" name="TextBox 46"/>
           <p:cNvSpPr txBox="1"/>
           <p:nvPr/>
         </p:nvSpPr>
@@ -5458,7 +5484,7 @@
       </p:sp>
       <p:sp>
         <p:nvSpPr>
-          <p:cNvPr id="47" name="Rectangle 46"/>
+          <p:cNvPr id="48" name="Rectangle 47"/>
           <p:cNvSpPr/>
           <p:nvPr/>
         </p:nvSpPr>
@@ -5501,7 +5527,7 @@
       </p:sp>
       <p:sp>
         <p:nvSpPr>
-          <p:cNvPr id="48" name="Rectangle 47"/>
+          <p:cNvPr id="49" name="Rectangle 48"/>
           <p:cNvSpPr/>
           <p:nvPr/>
         </p:nvSpPr>
@@ -5542,7 +5568,7 @@
       </p:sp>
       <p:sp>
         <p:nvSpPr>
-          <p:cNvPr id="49" name="Rectangle 48"/>
+          <p:cNvPr id="50" name="Rectangle 49"/>
           <p:cNvSpPr/>
           <p:nvPr/>
         </p:nvSpPr>
@@ -5583,7 +5609,7 @@
       </p:sp>
       <p:sp>
         <p:nvSpPr>
-          <p:cNvPr id="50" name="TextBox 49"/>
+          <p:cNvPr id="51" name="TextBox 50"/>
           <p:cNvSpPr txBox="1"/>
           <p:nvPr/>
         </p:nvSpPr>
@@ -5625,7 +5651,7 @@
       </p:sp>
       <p:sp>
         <p:nvSpPr>
-          <p:cNvPr id="51" name="TextBox 50"/>
+          <p:cNvPr id="52" name="TextBox 51"/>
           <p:cNvSpPr txBox="1"/>
           <p:nvPr/>
         </p:nvSpPr>
@@ -5729,9 +5755,35 @@
         <p:nvPr/>
       </p:nvGrpSpPr>
       <p:grpSpPr/>
-      <p:sp>
-        <p:nvSpPr>
-          <p:cNvPr id="2" name="Rectangle 1"/>
+      <p:pic>
+        <p:nvPicPr>
+          <p:cNvPr id="2" name="Picture 1" descr="bg-p2.png"/>
+          <p:cNvPicPr>
+            <a:picLocks noChangeAspect="1"/>
+          </p:cNvPicPr>
+          <p:nvPr/>
+        </p:nvPicPr>
+        <p:blipFill>
+          <a:blip r:embed="rId2">
+            <a:alphaModFix amt="80000"/>
+          </a:blip>
+          <a:stretch>
+            <a:fillRect/>
+          </a:stretch>
+        </p:blipFill>
+        <p:spPr>
+          <a:xfrm>
+            <a:off x="0" y="0"/>
+            <a:ext cx="7556399" cy="10692000"/>
+          </a:xfrm>
+          <a:prstGeom prst="rect">
+            <a:avLst/>
+          </a:prstGeom>
+        </p:spPr>
+      </p:pic>
+      <p:sp>
+        <p:nvSpPr>
+          <p:cNvPr id="3" name="Rectangle 2"/>
           <p:cNvSpPr/>
           <p:nvPr/>
         </p:nvSpPr>
@@ -5774,7 +5826,7 @@
       </p:sp>
       <p:sp>
         <p:nvSpPr>
-          <p:cNvPr id="3" name="Rectangle 2"/>
+          <p:cNvPr id="4" name="Rectangle 3"/>
           <p:cNvSpPr/>
           <p:nvPr/>
         </p:nvSpPr>
@@ -5815,7 +5867,7 @@
       </p:sp>
       <p:sp>
         <p:nvSpPr>
-          <p:cNvPr id="4" name="Rectangle 3"/>
+          <p:cNvPr id="5" name="Rectangle 4"/>
           <p:cNvSpPr/>
           <p:nvPr/>
         </p:nvSpPr>
@@ -5856,7 +5908,7 @@
       </p:sp>
       <p:sp>
         <p:nvSpPr>
-          <p:cNvPr id="5" name="TextBox 4"/>
+          <p:cNvPr id="6" name="TextBox 5"/>
           <p:cNvSpPr txBox="1"/>
           <p:nvPr/>
         </p:nvSpPr>
@@ -5898,7 +5950,7 @@
       </p:sp>
       <p:sp>
         <p:nvSpPr>
-          <p:cNvPr id="6" name="TextBox 5"/>
+          <p:cNvPr id="7" name="TextBox 6"/>
           <p:cNvSpPr txBox="1"/>
           <p:nvPr/>
         </p:nvSpPr>
@@ -5978,7 +6030,7 @@
       </p:sp>
       <p:sp>
         <p:nvSpPr>
-          <p:cNvPr id="7" name="Rectangle 6"/>
+          <p:cNvPr id="8" name="Rectangle 7"/>
           <p:cNvSpPr/>
           <p:nvPr/>
         </p:nvSpPr>
@@ -6021,7 +6073,7 @@
       </p:sp>
       <p:sp>
         <p:nvSpPr>
-          <p:cNvPr id="8" name="Rectangle 7"/>
+          <p:cNvPr id="9" name="Rectangle 8"/>
           <p:cNvSpPr/>
           <p:nvPr/>
         </p:nvSpPr>
@@ -6062,7 +6114,7 @@
       </p:sp>
       <p:sp>
         <p:nvSpPr>
-          <p:cNvPr id="9" name="Rectangle 8"/>
+          <p:cNvPr id="10" name="Rectangle 9"/>
           <p:cNvSpPr/>
           <p:nvPr/>
         </p:nvSpPr>
@@ -6103,7 +6155,7 @@
       </p:sp>
       <p:sp>
         <p:nvSpPr>
-          <p:cNvPr id="10" name="TextBox 9"/>
+          <p:cNvPr id="11" name="TextBox 10"/>
           <p:cNvSpPr txBox="1"/>
           <p:nvPr/>
         </p:nvSpPr>
@@ -6145,7 +6197,7 @@
       </p:sp>
       <p:sp>
         <p:nvSpPr>
-          <p:cNvPr id="11" name="TextBox 10"/>
+          <p:cNvPr id="12" name="TextBox 11"/>
           <p:cNvSpPr txBox="1"/>
           <p:nvPr/>
         </p:nvSpPr>
@@ -6225,7 +6277,7 @@
       </p:sp>
       <p:sp>
         <p:nvSpPr>
-          <p:cNvPr id="12" name="Rectangle 11"/>
+          <p:cNvPr id="13" name="Rectangle 12"/>
           <p:cNvSpPr/>
           <p:nvPr/>
         </p:nvSpPr>
@@ -6268,7 +6320,7 @@
       </p:sp>
       <p:sp>
         <p:nvSpPr>
-          <p:cNvPr id="13" name="Rectangle 12"/>
+          <p:cNvPr id="14" name="Rectangle 13"/>
           <p:cNvSpPr/>
           <p:nvPr/>
         </p:nvSpPr>
@@ -6309,7 +6361,7 @@
       </p:sp>
       <p:sp>
         <p:nvSpPr>
-          <p:cNvPr id="14" name="Rectangle 13"/>
+          <p:cNvPr id="15" name="Rectangle 14"/>
           <p:cNvSpPr/>
           <p:nvPr/>
         </p:nvSpPr>
@@ -6350,7 +6402,7 @@
       </p:sp>
       <p:sp>
         <p:nvSpPr>
-          <p:cNvPr id="15" name="TextBox 14"/>
+          <p:cNvPr id="16" name="TextBox 15"/>
           <p:cNvSpPr txBox="1"/>
           <p:nvPr/>
         </p:nvSpPr>
@@ -6392,7 +6444,7 @@
       </p:sp>
       <p:sp>
         <p:nvSpPr>
-          <p:cNvPr id="16" name="TextBox 15"/>
+          <p:cNvPr id="17" name="TextBox 16"/>
           <p:cNvSpPr txBox="1"/>
           <p:nvPr/>
         </p:nvSpPr>
@@ -6472,7 +6524,7 @@
       </p:sp>
       <p:sp>
         <p:nvSpPr>
-          <p:cNvPr id="17" name="Rectangle 16"/>
+          <p:cNvPr id="18" name="Rectangle 17"/>
           <p:cNvSpPr/>
           <p:nvPr/>
         </p:nvSpPr>
@@ -6515,7 +6567,7 @@
       </p:sp>
       <p:sp>
         <p:nvSpPr>
-          <p:cNvPr id="18" name="Rectangle 17"/>
+          <p:cNvPr id="19" name="Rectangle 18"/>
           <p:cNvSpPr/>
           <p:nvPr/>
         </p:nvSpPr>
@@ -6556,7 +6608,7 @@
       </p:sp>
       <p:sp>
         <p:nvSpPr>
-          <p:cNvPr id="19" name="TextBox 18"/>
+          <p:cNvPr id="20" name="TextBox 19"/>
           <p:cNvSpPr txBox="1"/>
           <p:nvPr/>
         </p:nvSpPr>
@@ -6598,7 +6650,7 @@
       </p:sp>
       <p:sp>
         <p:nvSpPr>
-          <p:cNvPr id="20" name="Rectangle 19"/>
+          <p:cNvPr id="21" name="Rectangle 20"/>
           <p:cNvSpPr/>
           <p:nvPr/>
         </p:nvSpPr>
@@ -6639,7 +6691,7 @@
       </p:sp>
       <p:sp>
         <p:nvSpPr>
-          <p:cNvPr id="21" name="TextBox 20"/>
+          <p:cNvPr id="22" name="TextBox 21"/>
           <p:cNvSpPr txBox="1"/>
           <p:nvPr/>
         </p:nvSpPr>
@@ -6766,7 +6818,7 @@
       </p:sp>
       <p:sp>
         <p:nvSpPr>
-          <p:cNvPr id="22" name="Rectangle 21"/>
+          <p:cNvPr id="23" name="Rectangle 22"/>
           <p:cNvSpPr/>
           <p:nvPr/>
         </p:nvSpPr>
@@ -6807,7 +6859,7 @@
       </p:sp>
       <p:sp>
         <p:nvSpPr>
-          <p:cNvPr id="23" name="TextBox 22"/>
+          <p:cNvPr id="24" name="TextBox 23"/>
           <p:cNvSpPr txBox="1"/>
           <p:nvPr/>
         </p:nvSpPr>
@@ -6934,7 +6986,7 @@
       </p:sp>
       <p:sp>
         <p:nvSpPr>
-          <p:cNvPr id="24" name="Rectangle 23"/>
+          <p:cNvPr id="25" name="Rectangle 24"/>
           <p:cNvSpPr/>
           <p:nvPr/>
         </p:nvSpPr>
@@ -6975,7 +7027,7 @@
       </p:sp>
       <p:sp>
         <p:nvSpPr>
-          <p:cNvPr id="25" name="TextBox 24"/>
+          <p:cNvPr id="26" name="TextBox 25"/>
           <p:cNvSpPr txBox="1"/>
           <p:nvPr/>
         </p:nvSpPr>

--- a/assets/fiches/B10-fiche-1h30.pptx
+++ b/assets/fiches/B10-fiche-1h30.pptx
@@ -3084,9 +3084,12 @@
   <p:cSld>
     <p:bg>
       <p:bgPr>
-        <a:solidFill>
-          <a:srgbClr val="FFFFFF"/>
-        </a:solidFill>
+        <a:blipFill>
+          <a:blip r:embed="rId2"/>
+          <a:stretch>
+            <a:fillRect/>
+          </a:stretch>
+        </a:blipFill>
         <a:effectLst/>
       </p:bgPr>
     </p:bg>
@@ -3097,35 +3100,9 @@
         <p:nvPr/>
       </p:nvGrpSpPr>
       <p:grpSpPr/>
-      <p:pic>
-        <p:nvPicPr>
-          <p:cNvPr id="2" name="Picture 1" descr="bg-p1.png"/>
-          <p:cNvPicPr>
-            <a:picLocks noChangeAspect="1"/>
-          </p:cNvPicPr>
-          <p:nvPr/>
-        </p:nvPicPr>
-        <p:blipFill>
-          <a:blip r:embed="rId2">
-            <a:alphaModFix amt="80000"/>
-          </a:blip>
-          <a:stretch>
-            <a:fillRect/>
-          </a:stretch>
-        </p:blipFill>
-        <p:spPr>
-          <a:xfrm>
-            <a:off x="0" y="0"/>
-            <a:ext cx="7556399" cy="10692000"/>
-          </a:xfrm>
-          <a:prstGeom prst="rect">
-            <a:avLst/>
-          </a:prstGeom>
-        </p:spPr>
-      </p:pic>
-      <p:sp>
-        <p:nvSpPr>
-          <p:cNvPr id="3" name="TextBox 2"/>
+      <p:sp>
+        <p:nvSpPr>
+          <p:cNvPr id="2" name="TextBox 1"/>
           <p:cNvSpPr txBox="1"/>
           <p:nvPr/>
         </p:nvSpPr>
@@ -3186,7 +3163,7 @@
       </p:sp>
       <p:sp>
         <p:nvSpPr>
-          <p:cNvPr id="4" name="Rectangle 3"/>
+          <p:cNvPr id="3" name="Rectangle 2"/>
           <p:cNvSpPr/>
           <p:nvPr/>
         </p:nvSpPr>
@@ -3229,7 +3206,7 @@
       </p:sp>
       <p:sp>
         <p:nvSpPr>
-          <p:cNvPr id="5" name="TextBox 4"/>
+          <p:cNvPr id="4" name="TextBox 3"/>
           <p:cNvSpPr txBox="1"/>
           <p:nvPr/>
         </p:nvSpPr>
@@ -3347,7 +3324,7 @@
       </p:sp>
       <p:sp>
         <p:nvSpPr>
-          <p:cNvPr id="6" name="Rectangle 5"/>
+          <p:cNvPr id="5" name="Rectangle 4"/>
           <p:cNvSpPr/>
           <p:nvPr/>
         </p:nvSpPr>
@@ -3390,7 +3367,7 @@
       </p:sp>
       <p:sp>
         <p:nvSpPr>
-          <p:cNvPr id="7" name="TextBox 6"/>
+          <p:cNvPr id="6" name="TextBox 5"/>
           <p:cNvSpPr txBox="1"/>
           <p:nvPr/>
         </p:nvSpPr>
@@ -3508,7 +3485,7 @@
       </p:sp>
       <p:sp>
         <p:nvSpPr>
-          <p:cNvPr id="8" name="Rectangle 7"/>
+          <p:cNvPr id="7" name="Rectangle 6"/>
           <p:cNvSpPr/>
           <p:nvPr/>
         </p:nvSpPr>
@@ -3551,7 +3528,7 @@
       </p:sp>
       <p:sp>
         <p:nvSpPr>
-          <p:cNvPr id="9" name="Rectangle 8"/>
+          <p:cNvPr id="8" name="Rectangle 7"/>
           <p:cNvSpPr/>
           <p:nvPr/>
         </p:nvSpPr>
@@ -3592,7 +3569,7 @@
       </p:sp>
       <p:sp>
         <p:nvSpPr>
-          <p:cNvPr id="10" name="Rectangle 9"/>
+          <p:cNvPr id="9" name="Rectangle 8"/>
           <p:cNvSpPr/>
           <p:nvPr/>
         </p:nvSpPr>
@@ -3633,14 +3610,56 @@
       </p:sp>
       <p:sp>
         <p:nvSpPr>
+          <p:cNvPr id="10" name="TextBox 9"/>
+          <p:cNvSpPr txBox="1"/>
+          <p:nvPr/>
+        </p:nvSpPr>
+        <p:spPr>
+          <a:xfrm>
+            <a:off x="763200" y="3031200"/>
+            <a:ext cx="468000" cy="158400"/>
+          </a:xfrm>
+          <a:prstGeom prst="rect">
+            <a:avLst/>
+          </a:prstGeom>
+          <a:noFill/>
+        </p:spPr>
+        <p:txBody>
+          <a:bodyPr wrap="square" tIns="0" bIns="0" lIns="18000" rIns="18000">
+            <a:spAutoFit/>
+          </a:bodyPr>
+          <a:lstStyle/>
+          <a:p>
+            <a:pPr algn="ctr">
+              <a:spcBef>
+                <a:spcPts val="0"/>
+              </a:spcBef>
+              <a:spcAft>
+                <a:spcPts val="100"/>
+              </a:spcAft>
+            </a:pPr>
+            <a:r>
+              <a:rPr sz="800" b="1" i="0">
+                <a:solidFill>
+                  <a:srgbClr val="FFFFFF"/>
+                </a:solidFill>
+                <a:latin typeface="Arial"/>
+              </a:rPr>
+              <a:t>0:02</a:t>
+            </a:r>
+          </a:p>
+        </p:txBody>
+      </p:sp>
+      <p:sp>
+        <p:nvSpPr>
           <p:cNvPr id="11" name="TextBox 10"/>
           <p:cNvSpPr txBox="1"/>
           <p:nvPr/>
         </p:nvSpPr>
         <p:spPr>
           <a:xfrm>
-            <a:off x="763200" y="3031200"/>
-            <a:ext cx="468000" cy="158400"/>
+            <a:off x="1303200" y="2800800"/>
+            <a:ext cx="5652000" cy="655200"/>
           </a:xfrm>
           <a:prstGeom prst="rect">
             <a:avLst/>
@@ -3653,7 +3672,7 @@
           </a:bodyPr>
           <a:lstStyle/>
           <a:p>
-            <a:pPr algn="ctr">
+            <a:pPr algn="l">
               <a:spcBef>
                 <a:spcPts val="0"/>
               </a:spcBef>
@@ -3664,36 +3683,13 @@
             <a:r>
               <a:rPr sz="800" b="1" i="0">
                 <a:solidFill>
-                  <a:srgbClr val="FFFFFF"/>
-                </a:solidFill>
-                <a:latin typeface="Arial"/>
-              </a:rPr>
-              <a:t>0:02</a:t>
-            </a:r>
-          </a:p>
-        </p:txBody>
-      </p:sp>
-      <p:sp>
-        <p:nvSpPr>
-          <p:cNvPr id="12" name="TextBox 11"/>
-          <p:cNvSpPr txBox="1"/>
-          <p:nvPr/>
-        </p:nvSpPr>
-        <p:spPr>
-          <a:xfrm>
-            <a:off x="1303200" y="2800800"/>
-            <a:ext cx="5652000" cy="655200"/>
-          </a:xfrm>
-          <a:prstGeom prst="rect">
-            <a:avLst/>
-          </a:prstGeom>
-          <a:noFill/>
-        </p:spPr>
-        <p:txBody>
-          <a:bodyPr wrap="square" tIns="0" bIns="0" lIns="18000" rIns="18000">
-            <a:spAutoFit/>
-          </a:bodyPr>
-          <a:lstStyle/>
+                  <a:srgbClr val="5EB3D2"/>
+                </a:solidFill>
+                <a:latin typeface="Arial"/>
+              </a:rPr>
+              <a:t>4 min</a:t>
+            </a:r>
+          </a:p>
           <a:p>
             <a:pPr algn="l">
               <a:spcBef>
@@ -3704,13 +3700,13 @@
               </a:spcAft>
             </a:pPr>
             <a:r>
-              <a:rPr sz="800" b="1" i="0">
-                <a:solidFill>
-                  <a:srgbClr val="5EB3D2"/>
-                </a:solidFill>
-                <a:latin typeface="Arial"/>
-              </a:rPr>
-              <a:t>4 min</a:t>
+              <a:rPr sz="900" b="1" i="0">
+                <a:solidFill>
+                  <a:srgbClr val="2B2B2B"/>
+                </a:solidFill>
+                <a:latin typeface="Arial"/>
+              </a:rPr>
+              <a:t>Au programme aujourd'hui</a:t>
             </a:r>
           </a:p>
           <a:p>
@@ -3723,31 +3719,12 @@
               </a:spcAft>
             </a:pPr>
             <a:r>
-              <a:rPr sz="900" b="1" i="0">
+              <a:rPr sz="800" b="0" i="0">
                 <a:solidFill>
                   <a:srgbClr val="2B2B2B"/>
                 </a:solidFill>
                 <a:latin typeface="Arial"/>
               </a:rPr>
-              <a:t>Au programme aujourd'hui</a:t>
-            </a:r>
-          </a:p>
-          <a:p>
-            <a:pPr algn="l">
-              <a:spcBef>
-                <a:spcPts val="0"/>
-              </a:spcBef>
-              <a:spcAft>
-                <a:spcPts val="100"/>
-              </a:spcAft>
-            </a:pPr>
-            <a:r>
-              <a:rPr sz="800" b="0" i="0">
-                <a:solidFill>
-                  <a:srgbClr val="2B2B2B"/>
-                </a:solidFill>
-                <a:latin typeface="Arial"/>
-              </a:rPr>
               <a:t>. Ce que nous allons découvrir ensemble</a:t>
             </a:r>
           </a:p>
@@ -3755,7 +3732,7 @@
       </p:sp>
       <p:sp>
         <p:nvSpPr>
-          <p:cNvPr id="13" name="Rectangle 12"/>
+          <p:cNvPr id="12" name="Rectangle 11"/>
           <p:cNvSpPr/>
           <p:nvPr/>
         </p:nvSpPr>
@@ -3798,7 +3775,7 @@
       </p:sp>
       <p:sp>
         <p:nvSpPr>
-          <p:cNvPr id="14" name="Rectangle 13"/>
+          <p:cNvPr id="13" name="Rectangle 12"/>
           <p:cNvSpPr/>
           <p:nvPr/>
         </p:nvSpPr>
@@ -3839,7 +3816,7 @@
       </p:sp>
       <p:sp>
         <p:nvSpPr>
-          <p:cNvPr id="15" name="Rectangle 14"/>
+          <p:cNvPr id="14" name="Rectangle 13"/>
           <p:cNvSpPr/>
           <p:nvPr/>
         </p:nvSpPr>
@@ -3880,14 +3857,56 @@
       </p:sp>
       <p:sp>
         <p:nvSpPr>
+          <p:cNvPr id="15" name="TextBox 14"/>
+          <p:cNvSpPr txBox="1"/>
+          <p:nvPr/>
+        </p:nvSpPr>
+        <p:spPr>
+          <a:xfrm>
+            <a:off x="763200" y="3780000"/>
+            <a:ext cx="468000" cy="158400"/>
+          </a:xfrm>
+          <a:prstGeom prst="rect">
+            <a:avLst/>
+          </a:prstGeom>
+          <a:noFill/>
+        </p:spPr>
+        <p:txBody>
+          <a:bodyPr wrap="square" tIns="0" bIns="0" lIns="18000" rIns="18000">
+            <a:spAutoFit/>
+          </a:bodyPr>
+          <a:lstStyle/>
+          <a:p>
+            <a:pPr algn="ctr">
+              <a:spcBef>
+                <a:spcPts val="0"/>
+              </a:spcBef>
+              <a:spcAft>
+                <a:spcPts val="100"/>
+              </a:spcAft>
+            </a:pPr>
+            <a:r>
+              <a:rPr sz="800" b="1" i="0">
+                <a:solidFill>
+                  <a:srgbClr val="FFFFFF"/>
+                </a:solidFill>
+                <a:latin typeface="Arial"/>
+              </a:rPr>
+              <a:t>0:06</a:t>
+            </a:r>
+          </a:p>
+        </p:txBody>
+      </p:sp>
+      <p:sp>
+        <p:nvSpPr>
           <p:cNvPr id="16" name="TextBox 15"/>
           <p:cNvSpPr txBox="1"/>
           <p:nvPr/>
         </p:nvSpPr>
         <p:spPr>
           <a:xfrm>
-            <a:off x="763200" y="3780000"/>
-            <a:ext cx="468000" cy="158400"/>
+            <a:off x="1303200" y="3549600"/>
+            <a:ext cx="5652000" cy="655200"/>
           </a:xfrm>
           <a:prstGeom prst="rect">
             <a:avLst/>
@@ -3900,7 +3919,7 @@
           </a:bodyPr>
           <a:lstStyle/>
           <a:p>
-            <a:pPr algn="ctr">
+            <a:pPr algn="l">
               <a:spcBef>
                 <a:spcPts val="0"/>
               </a:spcBef>
@@ -3911,36 +3930,13 @@
             <a:r>
               <a:rPr sz="800" b="1" i="0">
                 <a:solidFill>
-                  <a:srgbClr val="FFFFFF"/>
-                </a:solidFill>
-                <a:latin typeface="Arial"/>
-              </a:rPr>
-              <a:t>0:06</a:t>
-            </a:r>
-          </a:p>
-        </p:txBody>
-      </p:sp>
-      <p:sp>
-        <p:nvSpPr>
-          <p:cNvPr id="17" name="TextBox 16"/>
-          <p:cNvSpPr txBox="1"/>
-          <p:nvPr/>
-        </p:nvSpPr>
-        <p:spPr>
-          <a:xfrm>
-            <a:off x="1303200" y="3549600"/>
-            <a:ext cx="5652000" cy="655200"/>
-          </a:xfrm>
-          <a:prstGeom prst="rect">
-            <a:avLst/>
-          </a:prstGeom>
-          <a:noFill/>
-        </p:spPr>
-        <p:txBody>
-          <a:bodyPr wrap="square" tIns="0" bIns="0" lIns="18000" rIns="18000">
-            <a:spAutoFit/>
-          </a:bodyPr>
-          <a:lstStyle/>
+                  <a:srgbClr val="4388BC"/>
+                </a:solidFill>
+                <a:latin typeface="Arial"/>
+              </a:rPr>
+              <a:t>2 min</a:t>
+            </a:r>
+          </a:p>
           <a:p>
             <a:pPr algn="l">
               <a:spcBef>
@@ -3951,13 +3947,13 @@
               </a:spcAft>
             </a:pPr>
             <a:r>
-              <a:rPr sz="800" b="1" i="0">
-                <a:solidFill>
-                  <a:srgbClr val="4388BC"/>
-                </a:solidFill>
-                <a:latin typeface="Arial"/>
-              </a:rPr>
-              <a:t>2 min</a:t>
+              <a:rPr sz="900" b="1" i="0">
+                <a:solidFill>
+                  <a:srgbClr val="2B2B2B"/>
+                </a:solidFill>
+                <a:latin typeface="Arial"/>
+              </a:rPr>
+              <a:t>Chapitre 1 — La plateforme</a:t>
             </a:r>
           </a:p>
           <a:p>
@@ -3970,31 +3966,12 @@
               </a:spcAft>
             </a:pPr>
             <a:r>
-              <a:rPr sz="900" b="1" i="0">
+              <a:rPr sz="800" b="0" i="0">
                 <a:solidFill>
                   <a:srgbClr val="2B2B2B"/>
                 </a:solidFill>
                 <a:latin typeface="Arial"/>
               </a:rPr>
-              <a:t>Chapitre 1 — La plateforme</a:t>
-            </a:r>
-          </a:p>
-          <a:p>
-            <a:pPr algn="l">
-              <a:spcBef>
-                <a:spcPts val="0"/>
-              </a:spcBef>
-              <a:spcAft>
-                <a:spcPts val="100"/>
-              </a:spcAft>
-            </a:pPr>
-            <a:r>
-              <a:rPr sz="800" b="0" i="0">
-                <a:solidFill>
-                  <a:srgbClr val="2B2B2B"/>
-                </a:solidFill>
-                <a:latin typeface="Arial"/>
-              </a:rPr>
               <a:t>. Doctolib, c'est quoi exactement ?</a:t>
             </a:r>
           </a:p>
@@ -4002,7 +3979,7 @@
       </p:sp>
       <p:sp>
         <p:nvSpPr>
-          <p:cNvPr id="18" name="Rectangle 17"/>
+          <p:cNvPr id="17" name="Rectangle 16"/>
           <p:cNvSpPr/>
           <p:nvPr/>
         </p:nvSpPr>
@@ -4045,7 +4022,7 @@
       </p:sp>
       <p:sp>
         <p:nvSpPr>
-          <p:cNvPr id="19" name="Rectangle 18"/>
+          <p:cNvPr id="18" name="Rectangle 17"/>
           <p:cNvSpPr/>
           <p:nvPr/>
         </p:nvSpPr>
@@ -4086,7 +4063,7 @@
       </p:sp>
       <p:sp>
         <p:nvSpPr>
-          <p:cNvPr id="20" name="Rectangle 19"/>
+          <p:cNvPr id="19" name="Rectangle 18"/>
           <p:cNvSpPr/>
           <p:nvPr/>
         </p:nvSpPr>
@@ -4127,14 +4104,56 @@
       </p:sp>
       <p:sp>
         <p:nvSpPr>
+          <p:cNvPr id="20" name="TextBox 19"/>
+          <p:cNvSpPr txBox="1"/>
+          <p:nvPr/>
+        </p:nvSpPr>
+        <p:spPr>
+          <a:xfrm>
+            <a:off x="763200" y="4528800"/>
+            <a:ext cx="468000" cy="158400"/>
+          </a:xfrm>
+          <a:prstGeom prst="rect">
+            <a:avLst/>
+          </a:prstGeom>
+          <a:noFill/>
+        </p:spPr>
+        <p:txBody>
+          <a:bodyPr wrap="square" tIns="0" bIns="0" lIns="18000" rIns="18000">
+            <a:spAutoFit/>
+          </a:bodyPr>
+          <a:lstStyle/>
+          <a:p>
+            <a:pPr algn="ctr">
+              <a:spcBef>
+                <a:spcPts val="0"/>
+              </a:spcBef>
+              <a:spcAft>
+                <a:spcPts val="100"/>
+              </a:spcAft>
+            </a:pPr>
+            <a:r>
+              <a:rPr sz="800" b="1" i="0">
+                <a:solidFill>
+                  <a:srgbClr val="FFFFFF"/>
+                </a:solidFill>
+                <a:latin typeface="Arial"/>
+              </a:rPr>
+              <a:t>0:08</a:t>
+            </a:r>
+          </a:p>
+        </p:txBody>
+      </p:sp>
+      <p:sp>
+        <p:nvSpPr>
           <p:cNvPr id="21" name="TextBox 20"/>
           <p:cNvSpPr txBox="1"/>
           <p:nvPr/>
         </p:nvSpPr>
         <p:spPr>
           <a:xfrm>
-            <a:off x="763200" y="4528800"/>
-            <a:ext cx="468000" cy="158400"/>
+            <a:off x="1303200" y="4298400"/>
+            <a:ext cx="5652000" cy="655200"/>
           </a:xfrm>
           <a:prstGeom prst="rect">
             <a:avLst/>
@@ -4147,7 +4166,7 @@
           </a:bodyPr>
           <a:lstStyle/>
           <a:p>
-            <a:pPr algn="ctr">
+            <a:pPr algn="l">
               <a:spcBef>
                 <a:spcPts val="0"/>
               </a:spcBef>
@@ -4158,36 +4177,13 @@
             <a:r>
               <a:rPr sz="800" b="1" i="0">
                 <a:solidFill>
-                  <a:srgbClr val="FFFFFF"/>
-                </a:solidFill>
-                <a:latin typeface="Arial"/>
-              </a:rPr>
-              <a:t>0:08</a:t>
-            </a:r>
-          </a:p>
-        </p:txBody>
-      </p:sp>
-      <p:sp>
-        <p:nvSpPr>
-          <p:cNvPr id="22" name="TextBox 21"/>
-          <p:cNvSpPr txBox="1"/>
-          <p:nvPr/>
-        </p:nvSpPr>
-        <p:spPr>
-          <a:xfrm>
-            <a:off x="1303200" y="4298400"/>
-            <a:ext cx="5652000" cy="655200"/>
-          </a:xfrm>
-          <a:prstGeom prst="rect">
-            <a:avLst/>
-          </a:prstGeom>
-          <a:noFill/>
-        </p:spPr>
-        <p:txBody>
-          <a:bodyPr wrap="square" tIns="0" bIns="0" lIns="18000" rIns="18000">
-            <a:spAutoFit/>
-          </a:bodyPr>
-          <a:lstStyle/>
+                  <a:srgbClr val="187C88"/>
+                </a:solidFill>
+                <a:latin typeface="Arial"/>
+              </a:rPr>
+              <a:t>8 min</a:t>
+            </a:r>
+          </a:p>
           <a:p>
             <a:pPr algn="l">
               <a:spcBef>
@@ -4198,13 +4194,13 @@
               </a:spcAft>
             </a:pPr>
             <a:r>
-              <a:rPr sz="800" b="1" i="0">
-                <a:solidFill>
-                  <a:srgbClr val="187C88"/>
-                </a:solidFill>
-                <a:latin typeface="Arial"/>
-              </a:rPr>
-              <a:t>8 min</a:t>
+              <a:rPr sz="900" b="1" i="0">
+                <a:solidFill>
+                  <a:srgbClr val="2B2B2B"/>
+                </a:solidFill>
+                <a:latin typeface="Arial"/>
+              </a:rPr>
+              <a:t>Pourquoi l'utiliser ?</a:t>
             </a:r>
           </a:p>
           <a:p>
@@ -4217,31 +4213,12 @@
               </a:spcAft>
             </a:pPr>
             <a:r>
-              <a:rPr sz="900" b="1" i="0">
+              <a:rPr sz="800" b="0" i="0">
                 <a:solidFill>
                   <a:srgbClr val="2B2B2B"/>
                 </a:solidFill>
                 <a:latin typeface="Arial"/>
               </a:rPr>
-              <a:t>Pourquoi l'utiliser ?</a:t>
-            </a:r>
-          </a:p>
-          <a:p>
-            <a:pPr algn="l">
-              <a:spcBef>
-                <a:spcPts val="0"/>
-              </a:spcBef>
-              <a:spcAft>
-                <a:spcPts val="100"/>
-              </a:spcAft>
-            </a:pPr>
-            <a:r>
-              <a:rPr sz="800" b="0" i="0">
-                <a:solidFill>
-                  <a:srgbClr val="2B2B2B"/>
-                </a:solidFill>
-                <a:latin typeface="Arial"/>
-              </a:rPr>
               <a:t>. Les avantages concrets pour vous</a:t>
             </a:r>
           </a:p>
@@ -4249,7 +4226,7 @@
       </p:sp>
       <p:sp>
         <p:nvSpPr>
-          <p:cNvPr id="23" name="Rectangle 22"/>
+          <p:cNvPr id="22" name="Rectangle 21"/>
           <p:cNvSpPr/>
           <p:nvPr/>
         </p:nvSpPr>
@@ -4292,7 +4269,7 @@
       </p:sp>
       <p:sp>
         <p:nvSpPr>
-          <p:cNvPr id="24" name="Rectangle 23"/>
+          <p:cNvPr id="23" name="Rectangle 22"/>
           <p:cNvSpPr/>
           <p:nvPr/>
         </p:nvSpPr>
@@ -4333,7 +4310,7 @@
       </p:sp>
       <p:sp>
         <p:nvSpPr>
-          <p:cNvPr id="25" name="Rectangle 24"/>
+          <p:cNvPr id="24" name="Rectangle 23"/>
           <p:cNvSpPr/>
           <p:nvPr/>
         </p:nvSpPr>
@@ -4374,14 +4351,56 @@
       </p:sp>
       <p:sp>
         <p:nvSpPr>
+          <p:cNvPr id="25" name="TextBox 24"/>
+          <p:cNvSpPr txBox="1"/>
+          <p:nvPr/>
+        </p:nvSpPr>
+        <p:spPr>
+          <a:xfrm>
+            <a:off x="763200" y="5277600"/>
+            <a:ext cx="468000" cy="158400"/>
+          </a:xfrm>
+          <a:prstGeom prst="rect">
+            <a:avLst/>
+          </a:prstGeom>
+          <a:noFill/>
+        </p:spPr>
+        <p:txBody>
+          <a:bodyPr wrap="square" tIns="0" bIns="0" lIns="18000" rIns="18000">
+            <a:spAutoFit/>
+          </a:bodyPr>
+          <a:lstStyle/>
+          <a:p>
+            <a:pPr algn="ctr">
+              <a:spcBef>
+                <a:spcPts val="0"/>
+              </a:spcBef>
+              <a:spcAft>
+                <a:spcPts val="100"/>
+              </a:spcAft>
+            </a:pPr>
+            <a:r>
+              <a:rPr sz="800" b="1" i="0">
+                <a:solidFill>
+                  <a:srgbClr val="FFFFFF"/>
+                </a:solidFill>
+                <a:latin typeface="Arial"/>
+              </a:rPr>
+              <a:t>0:16</a:t>
+            </a:r>
+          </a:p>
+        </p:txBody>
+      </p:sp>
+      <p:sp>
+        <p:nvSpPr>
           <p:cNvPr id="26" name="TextBox 25"/>
           <p:cNvSpPr txBox="1"/>
           <p:nvPr/>
         </p:nvSpPr>
         <p:spPr>
           <a:xfrm>
-            <a:off x="763200" y="5277600"/>
-            <a:ext cx="468000" cy="158400"/>
+            <a:off x="1303200" y="5047200"/>
+            <a:ext cx="5652000" cy="655200"/>
           </a:xfrm>
           <a:prstGeom prst="rect">
             <a:avLst/>
@@ -4394,7 +4413,7 @@
           </a:bodyPr>
           <a:lstStyle/>
           <a:p>
-            <a:pPr algn="ctr">
+            <a:pPr algn="l">
               <a:spcBef>
                 <a:spcPts val="0"/>
               </a:spcBef>
@@ -4405,36 +4424,13 @@
             <a:r>
               <a:rPr sz="800" b="1" i="0">
                 <a:solidFill>
-                  <a:srgbClr val="FFFFFF"/>
-                </a:solidFill>
-                <a:latin typeface="Arial"/>
-              </a:rPr>
-              <a:t>0:16</a:t>
-            </a:r>
-          </a:p>
-        </p:txBody>
-      </p:sp>
-      <p:sp>
-        <p:nvSpPr>
-          <p:cNvPr id="27" name="TextBox 26"/>
-          <p:cNvSpPr txBox="1"/>
-          <p:nvPr/>
-        </p:nvSpPr>
-        <p:spPr>
-          <a:xfrm>
-            <a:off x="1303200" y="5047200"/>
-            <a:ext cx="5652000" cy="655200"/>
-          </a:xfrm>
-          <a:prstGeom prst="rect">
-            <a:avLst/>
-          </a:prstGeom>
-          <a:noFill/>
-        </p:spPr>
-        <p:txBody>
-          <a:bodyPr wrap="square" tIns="0" bIns="0" lIns="18000" rIns="18000">
-            <a:spAutoFit/>
-          </a:bodyPr>
-          <a:lstStyle/>
+                  <a:srgbClr val="4388BC"/>
+                </a:solidFill>
+                <a:latin typeface="Arial"/>
+              </a:rPr>
+              <a:t>8 min</a:t>
+            </a:r>
+          </a:p>
           <a:p>
             <a:pPr algn="l">
               <a:spcBef>
@@ -4445,13 +4441,13 @@
               </a:spcAft>
             </a:pPr>
             <a:r>
-              <a:rPr sz="800" b="1" i="0">
-                <a:solidFill>
-                  <a:srgbClr val="4388BC"/>
-                </a:solidFill>
-                <a:latin typeface="Arial"/>
-              </a:rPr>
-              <a:t>8 min</a:t>
+              <a:rPr sz="900" b="1" i="0">
+                <a:solidFill>
+                  <a:srgbClr val="2B2B2B"/>
+                </a:solidFill>
+                <a:latin typeface="Arial"/>
+              </a:rPr>
+              <a:t>Sécurité &amp; confiance</a:t>
             </a:r>
           </a:p>
           <a:p>
@@ -4464,31 +4460,12 @@
               </a:spcAft>
             </a:pPr>
             <a:r>
-              <a:rPr sz="900" b="1" i="0">
+              <a:rPr sz="800" b="0" i="0">
                 <a:solidFill>
                   <a:srgbClr val="2B2B2B"/>
                 </a:solidFill>
                 <a:latin typeface="Arial"/>
               </a:rPr>
-              <a:t>Sécurité &amp; confiance</a:t>
-            </a:r>
-          </a:p>
-          <a:p>
-            <a:pPr algn="l">
-              <a:spcBef>
-                <a:spcPts val="0"/>
-              </a:spcBef>
-              <a:spcAft>
-                <a:spcPts val="100"/>
-              </a:spcAft>
-            </a:pPr>
-            <a:r>
-              <a:rPr sz="800" b="0" i="0">
-                <a:solidFill>
-                  <a:srgbClr val="2B2B2B"/>
-                </a:solidFill>
-                <a:latin typeface="Arial"/>
-              </a:rPr>
               <a:t>. Vos données de santé sont-elles en sécurité ?</a:t>
             </a:r>
           </a:p>
@@ -4496,7 +4473,7 @@
       </p:sp>
       <p:sp>
         <p:nvSpPr>
-          <p:cNvPr id="28" name="Rectangle 27"/>
+          <p:cNvPr id="27" name="Rectangle 26"/>
           <p:cNvSpPr/>
           <p:nvPr/>
         </p:nvSpPr>
@@ -4539,7 +4516,7 @@
       </p:sp>
       <p:sp>
         <p:nvSpPr>
-          <p:cNvPr id="29" name="Rectangle 28"/>
+          <p:cNvPr id="28" name="Rectangle 27"/>
           <p:cNvSpPr/>
           <p:nvPr/>
         </p:nvSpPr>
@@ -4580,7 +4557,7 @@
       </p:sp>
       <p:sp>
         <p:nvSpPr>
-          <p:cNvPr id="30" name="Rectangle 29"/>
+          <p:cNvPr id="29" name="Rectangle 28"/>
           <p:cNvSpPr/>
           <p:nvPr/>
         </p:nvSpPr>
@@ -4621,14 +4598,56 @@
       </p:sp>
       <p:sp>
         <p:nvSpPr>
+          <p:cNvPr id="30" name="TextBox 29"/>
+          <p:cNvSpPr txBox="1"/>
+          <p:nvPr/>
+        </p:nvSpPr>
+        <p:spPr>
+          <a:xfrm>
+            <a:off x="763200" y="6026399"/>
+            <a:ext cx="468000" cy="158400"/>
+          </a:xfrm>
+          <a:prstGeom prst="rect">
+            <a:avLst/>
+          </a:prstGeom>
+          <a:noFill/>
+        </p:spPr>
+        <p:txBody>
+          <a:bodyPr wrap="square" tIns="0" bIns="0" lIns="18000" rIns="18000">
+            <a:spAutoFit/>
+          </a:bodyPr>
+          <a:lstStyle/>
+          <a:p>
+            <a:pPr algn="ctr">
+              <a:spcBef>
+                <a:spcPts val="0"/>
+              </a:spcBef>
+              <a:spcAft>
+                <a:spcPts val="100"/>
+              </a:spcAft>
+            </a:pPr>
+            <a:r>
+              <a:rPr sz="800" b="1" i="0">
+                <a:solidFill>
+                  <a:srgbClr val="FFFFFF"/>
+                </a:solidFill>
+                <a:latin typeface="Arial"/>
+              </a:rPr>
+              <a:t>0:24</a:t>
+            </a:r>
+          </a:p>
+        </p:txBody>
+      </p:sp>
+      <p:sp>
+        <p:nvSpPr>
           <p:cNvPr id="31" name="TextBox 30"/>
           <p:cNvSpPr txBox="1"/>
           <p:nvPr/>
         </p:nvSpPr>
         <p:spPr>
           <a:xfrm>
-            <a:off x="763200" y="6026399"/>
-            <a:ext cx="468000" cy="158400"/>
+            <a:off x="1303200" y="5796000"/>
+            <a:ext cx="5652000" cy="655200"/>
           </a:xfrm>
           <a:prstGeom prst="rect">
             <a:avLst/>
@@ -4641,7 +4660,7 @@
           </a:bodyPr>
           <a:lstStyle/>
           <a:p>
-            <a:pPr algn="ctr">
+            <a:pPr algn="l">
               <a:spcBef>
                 <a:spcPts val="0"/>
               </a:spcBef>
@@ -4652,36 +4671,13 @@
             <a:r>
               <a:rPr sz="800" b="1" i="0">
                 <a:solidFill>
-                  <a:srgbClr val="FFFFFF"/>
-                </a:solidFill>
-                <a:latin typeface="Arial"/>
-              </a:rPr>
-              <a:t>0:24</a:t>
-            </a:r>
-          </a:p>
-        </p:txBody>
-      </p:sp>
-      <p:sp>
-        <p:nvSpPr>
-          <p:cNvPr id="32" name="TextBox 31"/>
-          <p:cNvSpPr txBox="1"/>
-          <p:nvPr/>
-        </p:nvSpPr>
-        <p:spPr>
-          <a:xfrm>
-            <a:off x="1303200" y="5796000"/>
-            <a:ext cx="5652000" cy="655200"/>
-          </a:xfrm>
-          <a:prstGeom prst="rect">
-            <a:avLst/>
-          </a:prstGeom>
-          <a:noFill/>
-        </p:spPr>
-        <p:txBody>
-          <a:bodyPr wrap="square" tIns="0" bIns="0" lIns="18000" rIns="18000">
-            <a:spAutoFit/>
-          </a:bodyPr>
-          <a:lstStyle/>
+                  <a:srgbClr val="187C88"/>
+                </a:solidFill>
+                <a:latin typeface="Arial"/>
+              </a:rPr>
+              <a:t>2 min</a:t>
+            </a:r>
+          </a:p>
           <a:p>
             <a:pPr algn="l">
               <a:spcBef>
@@ -4692,13 +4688,13 @@
               </a:spcAft>
             </a:pPr>
             <a:r>
-              <a:rPr sz="800" b="1" i="0">
-                <a:solidFill>
-                  <a:srgbClr val="187C88"/>
-                </a:solidFill>
-                <a:latin typeface="Arial"/>
-              </a:rPr>
-              <a:t>2 min</a:t>
+              <a:rPr sz="900" b="1" i="0">
+                <a:solidFill>
+                  <a:srgbClr val="2B2B2B"/>
+                </a:solidFill>
+                <a:latin typeface="Arial"/>
+              </a:rPr>
+              <a:t>Chapitre 2 — Naviguer sur le site</a:t>
             </a:r>
           </a:p>
           <a:p>
@@ -4711,31 +4707,12 @@
               </a:spcAft>
             </a:pPr>
             <a:r>
-              <a:rPr sz="900" b="1" i="0">
+              <a:rPr sz="800" b="0" i="0">
                 <a:solidFill>
                   <a:srgbClr val="2B2B2B"/>
                 </a:solidFill>
                 <a:latin typeface="Arial"/>
               </a:rPr>
-              <a:t>Chapitre 2 — Naviguer sur le site</a:t>
-            </a:r>
-          </a:p>
-          <a:p>
-            <a:pPr algn="l">
-              <a:spcBef>
-                <a:spcPts val="0"/>
-              </a:spcBef>
-              <a:spcAft>
-                <a:spcPts val="100"/>
-              </a:spcAft>
-            </a:pPr>
-            <a:r>
-              <a:rPr sz="800" b="0" i="0">
-                <a:solidFill>
-                  <a:srgbClr val="2B2B2B"/>
-                </a:solidFill>
-                <a:latin typeface="Arial"/>
-              </a:rPr>
               <a:t>. Créer votre compte Doctolib pas à pas</a:t>
             </a:r>
           </a:p>
@@ -4743,7 +4720,7 @@
       </p:sp>
       <p:sp>
         <p:nvSpPr>
-          <p:cNvPr id="33" name="Rectangle 32"/>
+          <p:cNvPr id="32" name="Rectangle 31"/>
           <p:cNvSpPr/>
           <p:nvPr/>
         </p:nvSpPr>
@@ -4786,7 +4763,7 @@
       </p:sp>
       <p:sp>
         <p:nvSpPr>
-          <p:cNvPr id="34" name="Rectangle 33"/>
+          <p:cNvPr id="33" name="Rectangle 32"/>
           <p:cNvSpPr/>
           <p:nvPr/>
         </p:nvSpPr>
@@ -4827,7 +4804,7 @@
       </p:sp>
       <p:sp>
         <p:nvSpPr>
-          <p:cNvPr id="35" name="Rectangle 34"/>
+          <p:cNvPr id="34" name="Rectangle 33"/>
           <p:cNvSpPr/>
           <p:nvPr/>
         </p:nvSpPr>
@@ -4868,14 +4845,56 @@
       </p:sp>
       <p:sp>
         <p:nvSpPr>
+          <p:cNvPr id="35" name="TextBox 34"/>
+          <p:cNvSpPr txBox="1"/>
+          <p:nvPr/>
+        </p:nvSpPr>
+        <p:spPr>
+          <a:xfrm>
+            <a:off x="763200" y="6775200"/>
+            <a:ext cx="468000" cy="158400"/>
+          </a:xfrm>
+          <a:prstGeom prst="rect">
+            <a:avLst/>
+          </a:prstGeom>
+          <a:noFill/>
+        </p:spPr>
+        <p:txBody>
+          <a:bodyPr wrap="square" tIns="0" bIns="0" lIns="18000" rIns="18000">
+            <a:spAutoFit/>
+          </a:bodyPr>
+          <a:lstStyle/>
+          <a:p>
+            <a:pPr algn="ctr">
+              <a:spcBef>
+                <a:spcPts val="0"/>
+              </a:spcBef>
+              <a:spcAft>
+                <a:spcPts val="100"/>
+              </a:spcAft>
+            </a:pPr>
+            <a:r>
+              <a:rPr sz="800" b="1" i="0">
+                <a:solidFill>
+                  <a:srgbClr val="FFFFFF"/>
+                </a:solidFill>
+                <a:latin typeface="Arial"/>
+              </a:rPr>
+              <a:t>0:26</a:t>
+            </a:r>
+          </a:p>
+        </p:txBody>
+      </p:sp>
+      <p:sp>
+        <p:nvSpPr>
           <p:cNvPr id="36" name="TextBox 35"/>
           <p:cNvSpPr txBox="1"/>
           <p:nvPr/>
         </p:nvSpPr>
         <p:spPr>
           <a:xfrm>
-            <a:off x="763200" y="6775200"/>
-            <a:ext cx="468000" cy="158400"/>
+            <a:off x="1303200" y="6544800"/>
+            <a:ext cx="5652000" cy="655200"/>
           </a:xfrm>
           <a:prstGeom prst="rect">
             <a:avLst/>
@@ -4888,7 +4907,7 @@
           </a:bodyPr>
           <a:lstStyle/>
           <a:p>
-            <a:pPr algn="ctr">
+            <a:pPr algn="l">
               <a:spcBef>
                 <a:spcPts val="0"/>
               </a:spcBef>
@@ -4899,36 +4918,13 @@
             <a:r>
               <a:rPr sz="800" b="1" i="0">
                 <a:solidFill>
-                  <a:srgbClr val="FFFFFF"/>
-                </a:solidFill>
-                <a:latin typeface="Arial"/>
-              </a:rPr>
-              <a:t>0:26</a:t>
-            </a:r>
-          </a:p>
-        </p:txBody>
-      </p:sp>
-      <p:sp>
-        <p:nvSpPr>
-          <p:cNvPr id="37" name="TextBox 36"/>
-          <p:cNvSpPr txBox="1"/>
-          <p:nvPr/>
-        </p:nvSpPr>
-        <p:spPr>
-          <a:xfrm>
-            <a:off x="1303200" y="6544800"/>
-            <a:ext cx="5652000" cy="655200"/>
-          </a:xfrm>
-          <a:prstGeom prst="rect">
-            <a:avLst/>
-          </a:prstGeom>
-          <a:noFill/>
-        </p:spPr>
-        <p:txBody>
-          <a:bodyPr wrap="square" tIns="0" bIns="0" lIns="18000" rIns="18000">
-            <a:spAutoFit/>
-          </a:bodyPr>
-          <a:lstStyle/>
+                  <a:srgbClr val="5EB3D2"/>
+                </a:solidFill>
+                <a:latin typeface="Arial"/>
+              </a:rPr>
+              <a:t>8 min</a:t>
+            </a:r>
+          </a:p>
           <a:p>
             <a:pPr algn="l">
               <a:spcBef>
@@ -4939,13 +4935,13 @@
               </a:spcAft>
             </a:pPr>
             <a:r>
-              <a:rPr sz="800" b="1" i="0">
-                <a:solidFill>
-                  <a:srgbClr val="5EB3D2"/>
-                </a:solidFill>
-                <a:latin typeface="Arial"/>
-              </a:rPr>
-              <a:t>8 min</a:t>
+              <a:rPr sz="900" b="1" i="0">
+                <a:solidFill>
+                  <a:srgbClr val="2B2B2B"/>
+                </a:solidFill>
+                <a:latin typeface="Arial"/>
+              </a:rPr>
+              <a:t>Trouver un professionnel de santé</a:t>
             </a:r>
           </a:p>
           <a:p>
@@ -4958,31 +4954,12 @@
               </a:spcAft>
             </a:pPr>
             <a:r>
-              <a:rPr sz="900" b="1" i="0">
+              <a:rPr sz="800" b="0" i="0">
                 <a:solidFill>
                   <a:srgbClr val="2B2B2B"/>
                 </a:solidFill>
                 <a:latin typeface="Arial"/>
               </a:rPr>
-              <a:t>Trouver un professionnel de santé</a:t>
-            </a:r>
-          </a:p>
-          <a:p>
-            <a:pPr algn="l">
-              <a:spcBef>
-                <a:spcPts val="0"/>
-              </a:spcBef>
-              <a:spcAft>
-                <a:spcPts val="100"/>
-              </a:spcAft>
-            </a:pPr>
-            <a:r>
-              <a:rPr sz="800" b="0" i="0">
-                <a:solidFill>
-                  <a:srgbClr val="2B2B2B"/>
-                </a:solidFill>
-                <a:latin typeface="Arial"/>
-              </a:rPr>
               <a:t>. Chercher et choisir son médecin</a:t>
             </a:r>
           </a:p>
@@ -4990,7 +4967,7 @@
       </p:sp>
       <p:sp>
         <p:nvSpPr>
-          <p:cNvPr id="38" name="Rectangle 37"/>
+          <p:cNvPr id="37" name="Rectangle 36"/>
           <p:cNvSpPr/>
           <p:nvPr/>
         </p:nvSpPr>
@@ -5033,7 +5010,7 @@
       </p:sp>
       <p:sp>
         <p:nvSpPr>
-          <p:cNvPr id="39" name="Rectangle 38"/>
+          <p:cNvPr id="38" name="Rectangle 37"/>
           <p:cNvSpPr/>
           <p:nvPr/>
         </p:nvSpPr>
@@ -5074,7 +5051,7 @@
       </p:sp>
       <p:sp>
         <p:nvSpPr>
-          <p:cNvPr id="40" name="Rectangle 39"/>
+          <p:cNvPr id="39" name="Rectangle 38"/>
           <p:cNvSpPr/>
           <p:nvPr/>
         </p:nvSpPr>
@@ -5115,14 +5092,56 @@
       </p:sp>
       <p:sp>
         <p:nvSpPr>
+          <p:cNvPr id="40" name="TextBox 39"/>
+          <p:cNvSpPr txBox="1"/>
+          <p:nvPr/>
+        </p:nvSpPr>
+        <p:spPr>
+          <a:xfrm>
+            <a:off x="763200" y="7523999"/>
+            <a:ext cx="468000" cy="158400"/>
+          </a:xfrm>
+          <a:prstGeom prst="rect">
+            <a:avLst/>
+          </a:prstGeom>
+          <a:noFill/>
+        </p:spPr>
+        <p:txBody>
+          <a:bodyPr wrap="square" tIns="0" bIns="0" lIns="18000" rIns="18000">
+            <a:spAutoFit/>
+          </a:bodyPr>
+          <a:lstStyle/>
+          <a:p>
+            <a:pPr algn="ctr">
+              <a:spcBef>
+                <a:spcPts val="0"/>
+              </a:spcBef>
+              <a:spcAft>
+                <a:spcPts val="100"/>
+              </a:spcAft>
+            </a:pPr>
+            <a:r>
+              <a:rPr sz="800" b="1" i="0">
+                <a:solidFill>
+                  <a:srgbClr val="FFFFFF"/>
+                </a:solidFill>
+                <a:latin typeface="Arial"/>
+              </a:rPr>
+              <a:t>0:34</a:t>
+            </a:r>
+          </a:p>
+        </p:txBody>
+      </p:sp>
+      <p:sp>
+        <p:nvSpPr>
           <p:cNvPr id="41" name="TextBox 40"/>
           <p:cNvSpPr txBox="1"/>
           <p:nvPr/>
         </p:nvSpPr>
         <p:spPr>
           <a:xfrm>
-            <a:off x="763200" y="7523999"/>
-            <a:ext cx="468000" cy="158400"/>
+            <a:off x="1303200" y="7293599"/>
+            <a:ext cx="5652000" cy="655200"/>
           </a:xfrm>
           <a:prstGeom prst="rect">
             <a:avLst/>
@@ -5135,7 +5154,7 @@
           </a:bodyPr>
           <a:lstStyle/>
           <a:p>
-            <a:pPr algn="ctr">
+            <a:pPr algn="l">
               <a:spcBef>
                 <a:spcPts val="0"/>
               </a:spcBef>
@@ -5146,36 +5165,13 @@
             <a:r>
               <a:rPr sz="800" b="1" i="0">
                 <a:solidFill>
-                  <a:srgbClr val="FFFFFF"/>
-                </a:solidFill>
-                <a:latin typeface="Arial"/>
-              </a:rPr>
-              <a:t>0:34</a:t>
-            </a:r>
-          </a:p>
-        </p:txBody>
-      </p:sp>
-      <p:sp>
-        <p:nvSpPr>
-          <p:cNvPr id="42" name="TextBox 41"/>
-          <p:cNvSpPr txBox="1"/>
-          <p:nvPr/>
-        </p:nvSpPr>
-        <p:spPr>
-          <a:xfrm>
-            <a:off x="1303200" y="7293599"/>
-            <a:ext cx="5652000" cy="655200"/>
-          </a:xfrm>
-          <a:prstGeom prst="rect">
-            <a:avLst/>
-          </a:prstGeom>
-          <a:noFill/>
-        </p:spPr>
-        <p:txBody>
-          <a:bodyPr wrap="square" tIns="0" bIns="0" lIns="18000" rIns="18000">
-            <a:spAutoFit/>
-          </a:bodyPr>
-          <a:lstStyle/>
+                  <a:srgbClr val="5EB3D2"/>
+                </a:solidFill>
+                <a:latin typeface="Arial"/>
+              </a:rPr>
+              <a:t>8 min</a:t>
+            </a:r>
+          </a:p>
           <a:p>
             <a:pPr algn="l">
               <a:spcBef>
@@ -5186,13 +5182,13 @@
               </a:spcAft>
             </a:pPr>
             <a:r>
-              <a:rPr sz="800" b="1" i="0">
-                <a:solidFill>
-                  <a:srgbClr val="5EB3D2"/>
-                </a:solidFill>
-                <a:latin typeface="Arial"/>
-              </a:rPr>
-              <a:t>8 min</a:t>
+              <a:rPr sz="900" b="1" i="0">
+                <a:solidFill>
+                  <a:srgbClr val="2B2B2B"/>
+                </a:solidFill>
+                <a:latin typeface="Arial"/>
+              </a:rPr>
+              <a:t>Prendre rendez-vous</a:t>
             </a:r>
           </a:p>
           <a:p>
@@ -5205,31 +5201,12 @@
               </a:spcAft>
             </a:pPr>
             <a:r>
-              <a:rPr sz="900" b="1" i="0">
+              <a:rPr sz="800" b="0" i="0">
                 <a:solidFill>
                   <a:srgbClr val="2B2B2B"/>
                 </a:solidFill>
                 <a:latin typeface="Arial"/>
               </a:rPr>
-              <a:t>Prendre rendez-vous</a:t>
-            </a:r>
-          </a:p>
-          <a:p>
-            <a:pPr algn="l">
-              <a:spcBef>
-                <a:spcPts val="0"/>
-              </a:spcBef>
-              <a:spcAft>
-                <a:spcPts val="100"/>
-              </a:spcAft>
-            </a:pPr>
-            <a:r>
-              <a:rPr sz="800" b="0" i="0">
-                <a:solidFill>
-                  <a:srgbClr val="2B2B2B"/>
-                </a:solidFill>
-                <a:latin typeface="Arial"/>
-              </a:rPr>
               <a:t>. De la recherche à la confirmation en 4 clics</a:t>
             </a:r>
           </a:p>
@@ -5237,7 +5214,7 @@
       </p:sp>
       <p:sp>
         <p:nvSpPr>
-          <p:cNvPr id="43" name="Rectangle 42"/>
+          <p:cNvPr id="42" name="Rectangle 41"/>
           <p:cNvSpPr/>
           <p:nvPr/>
         </p:nvSpPr>
@@ -5280,7 +5257,7 @@
       </p:sp>
       <p:sp>
         <p:nvSpPr>
-          <p:cNvPr id="44" name="Rectangle 43"/>
+          <p:cNvPr id="43" name="Rectangle 42"/>
           <p:cNvSpPr/>
           <p:nvPr/>
         </p:nvSpPr>
@@ -5321,7 +5298,7 @@
       </p:sp>
       <p:sp>
         <p:nvSpPr>
-          <p:cNvPr id="45" name="Rectangle 44"/>
+          <p:cNvPr id="44" name="Rectangle 43"/>
           <p:cNvSpPr/>
           <p:nvPr/>
         </p:nvSpPr>
@@ -5362,14 +5339,56 @@
       </p:sp>
       <p:sp>
         <p:nvSpPr>
+          <p:cNvPr id="45" name="TextBox 44"/>
+          <p:cNvSpPr txBox="1"/>
+          <p:nvPr/>
+        </p:nvSpPr>
+        <p:spPr>
+          <a:xfrm>
+            <a:off x="763200" y="8272799"/>
+            <a:ext cx="468000" cy="158400"/>
+          </a:xfrm>
+          <a:prstGeom prst="rect">
+            <a:avLst/>
+          </a:prstGeom>
+          <a:noFill/>
+        </p:spPr>
+        <p:txBody>
+          <a:bodyPr wrap="square" tIns="0" bIns="0" lIns="18000" rIns="18000">
+            <a:spAutoFit/>
+          </a:bodyPr>
+          <a:lstStyle/>
+          <a:p>
+            <a:pPr algn="ctr">
+              <a:spcBef>
+                <a:spcPts val="0"/>
+              </a:spcBef>
+              <a:spcAft>
+                <a:spcPts val="100"/>
+              </a:spcAft>
+            </a:pPr>
+            <a:r>
+              <a:rPr sz="800" b="1" i="0">
+                <a:solidFill>
+                  <a:srgbClr val="FFFFFF"/>
+                </a:solidFill>
+                <a:latin typeface="Arial"/>
+              </a:rPr>
+              <a:t>0:42</a:t>
+            </a:r>
+          </a:p>
+        </p:txBody>
+      </p:sp>
+      <p:sp>
+        <p:nvSpPr>
           <p:cNvPr id="46" name="TextBox 45"/>
           <p:cNvSpPr txBox="1"/>
           <p:nvPr/>
         </p:nvSpPr>
         <p:spPr>
           <a:xfrm>
-            <a:off x="763200" y="8272799"/>
-            <a:ext cx="468000" cy="158400"/>
+            <a:off x="1303200" y="8042399"/>
+            <a:ext cx="5652000" cy="655200"/>
           </a:xfrm>
           <a:prstGeom prst="rect">
             <a:avLst/>
@@ -5382,7 +5401,7 @@
           </a:bodyPr>
           <a:lstStyle/>
           <a:p>
-            <a:pPr algn="ctr">
+            <a:pPr algn="l">
               <a:spcBef>
                 <a:spcPts val="0"/>
               </a:spcBef>
@@ -5393,36 +5412,13 @@
             <a:r>
               <a:rPr sz="800" b="1" i="0">
                 <a:solidFill>
-                  <a:srgbClr val="FFFFFF"/>
-                </a:solidFill>
-                <a:latin typeface="Arial"/>
-              </a:rPr>
-              <a:t>0:42</a:t>
-            </a:r>
-          </a:p>
-        </p:txBody>
-      </p:sp>
-      <p:sp>
-        <p:nvSpPr>
-          <p:cNvPr id="47" name="TextBox 46"/>
-          <p:cNvSpPr txBox="1"/>
-          <p:nvPr/>
-        </p:nvSpPr>
-        <p:spPr>
-          <a:xfrm>
-            <a:off x="1303200" y="8042399"/>
-            <a:ext cx="5652000" cy="655200"/>
-          </a:xfrm>
-          <a:prstGeom prst="rect">
-            <a:avLst/>
-          </a:prstGeom>
-          <a:noFill/>
-        </p:spPr>
-        <p:txBody>
-          <a:bodyPr wrap="square" tIns="0" bIns="0" lIns="18000" rIns="18000">
-            <a:spAutoFit/>
-          </a:bodyPr>
-          <a:lstStyle/>
+                  <a:srgbClr val="4388BC"/>
+                </a:solidFill>
+                <a:latin typeface="Arial"/>
+              </a:rPr>
+              <a:t>2 min</a:t>
+            </a:r>
+          </a:p>
           <a:p>
             <a:pPr algn="l">
               <a:spcBef>
@@ -5433,13 +5429,13 @@
               </a:spcAft>
             </a:pPr>
             <a:r>
-              <a:rPr sz="800" b="1" i="0">
-                <a:solidFill>
-                  <a:srgbClr val="4388BC"/>
-                </a:solidFill>
-                <a:latin typeface="Arial"/>
-              </a:rPr>
-              <a:t>2 min</a:t>
+              <a:rPr sz="900" b="1" i="0">
+                <a:solidFill>
+                  <a:srgbClr val="2B2B2B"/>
+                </a:solidFill>
+                <a:latin typeface="Arial"/>
+              </a:rPr>
+              <a:t>Chapitre 3 — La téléconsultation</a:t>
             </a:r>
           </a:p>
           <a:p>
@@ -5452,31 +5448,12 @@
               </a:spcAft>
             </a:pPr>
             <a:r>
-              <a:rPr sz="900" b="1" i="0">
+              <a:rPr sz="800" b="0" i="0">
                 <a:solidFill>
                   <a:srgbClr val="2B2B2B"/>
                 </a:solidFill>
                 <a:latin typeface="Arial"/>
               </a:rPr>
-              <a:t>Chapitre 3 — La téléconsultation</a:t>
-            </a:r>
-          </a:p>
-          <a:p>
-            <a:pPr algn="l">
-              <a:spcBef>
-                <a:spcPts val="0"/>
-              </a:spcBef>
-              <a:spcAft>
-                <a:spcPts val="100"/>
-              </a:spcAft>
-            </a:pPr>
-            <a:r>
-              <a:rPr sz="800" b="0" i="0">
-                <a:solidFill>
-                  <a:srgbClr val="2B2B2B"/>
-                </a:solidFill>
-                <a:latin typeface="Arial"/>
-              </a:rPr>
               <a:t>. Consulter un médecin depuis votre canapé</a:t>
             </a:r>
           </a:p>
@@ -5484,7 +5461,7 @@
       </p:sp>
       <p:sp>
         <p:nvSpPr>
-          <p:cNvPr id="48" name="Rectangle 47"/>
+          <p:cNvPr id="47" name="Rectangle 46"/>
           <p:cNvSpPr/>
           <p:nvPr/>
         </p:nvSpPr>
@@ -5527,7 +5504,7 @@
       </p:sp>
       <p:sp>
         <p:nvSpPr>
-          <p:cNvPr id="49" name="Rectangle 48"/>
+          <p:cNvPr id="48" name="Rectangle 47"/>
           <p:cNvSpPr/>
           <p:nvPr/>
         </p:nvSpPr>
@@ -5568,7 +5545,7 @@
       </p:sp>
       <p:sp>
         <p:nvSpPr>
-          <p:cNvPr id="50" name="Rectangle 49"/>
+          <p:cNvPr id="49" name="Rectangle 48"/>
           <p:cNvSpPr/>
           <p:nvPr/>
         </p:nvSpPr>
@@ -5609,7 +5586,7 @@
       </p:sp>
       <p:sp>
         <p:nvSpPr>
-          <p:cNvPr id="51" name="TextBox 50"/>
+          <p:cNvPr id="50" name="TextBox 49"/>
           <p:cNvSpPr txBox="1"/>
           <p:nvPr/>
         </p:nvSpPr>
@@ -5651,7 +5628,7 @@
       </p:sp>
       <p:sp>
         <p:nvSpPr>
-          <p:cNvPr id="52" name="TextBox 51"/>
+          <p:cNvPr id="51" name="TextBox 50"/>
           <p:cNvSpPr txBox="1"/>
           <p:nvPr/>
         </p:nvSpPr>
@@ -5742,9 +5719,12 @@
   <p:cSld>
     <p:bg>
       <p:bgPr>
-        <a:solidFill>
-          <a:srgbClr val="FFFFFF"/>
-        </a:solidFill>
+        <a:blipFill>
+          <a:blip r:embed="rId2"/>
+          <a:stretch>
+            <a:fillRect/>
+          </a:stretch>
+        </a:blipFill>
         <a:effectLst/>
       </p:bgPr>
     </p:bg>
@@ -5755,35 +5735,9 @@
         <p:nvPr/>
       </p:nvGrpSpPr>
       <p:grpSpPr/>
-      <p:pic>
-        <p:nvPicPr>
-          <p:cNvPr id="2" name="Picture 1" descr="bg-p2.png"/>
-          <p:cNvPicPr>
-            <a:picLocks noChangeAspect="1"/>
-          </p:cNvPicPr>
-          <p:nvPr/>
-        </p:nvPicPr>
-        <p:blipFill>
-          <a:blip r:embed="rId2">
-            <a:alphaModFix amt="80000"/>
-          </a:blip>
-          <a:stretch>
-            <a:fillRect/>
-          </a:stretch>
-        </p:blipFill>
-        <p:spPr>
-          <a:xfrm>
-            <a:off x="0" y="0"/>
-            <a:ext cx="7556399" cy="10692000"/>
-          </a:xfrm>
-          <a:prstGeom prst="rect">
-            <a:avLst/>
-          </a:prstGeom>
-        </p:spPr>
-      </p:pic>
-      <p:sp>
-        <p:nvSpPr>
-          <p:cNvPr id="3" name="Rectangle 2"/>
+      <p:sp>
+        <p:nvSpPr>
+          <p:cNvPr id="2" name="Rectangle 1"/>
           <p:cNvSpPr/>
           <p:nvPr/>
         </p:nvSpPr>
@@ -5826,7 +5780,7 @@
       </p:sp>
       <p:sp>
         <p:nvSpPr>
-          <p:cNvPr id="4" name="Rectangle 3"/>
+          <p:cNvPr id="3" name="Rectangle 2"/>
           <p:cNvSpPr/>
           <p:nvPr/>
         </p:nvSpPr>
@@ -5867,7 +5821,7 @@
       </p:sp>
       <p:sp>
         <p:nvSpPr>
-          <p:cNvPr id="5" name="Rectangle 4"/>
+          <p:cNvPr id="4" name="Rectangle 3"/>
           <p:cNvSpPr/>
           <p:nvPr/>
         </p:nvSpPr>
@@ -5908,14 +5862,56 @@
       </p:sp>
       <p:sp>
         <p:nvSpPr>
+          <p:cNvPr id="5" name="TextBox 4"/>
+          <p:cNvSpPr txBox="1"/>
+          <p:nvPr/>
+        </p:nvSpPr>
+        <p:spPr>
+          <a:xfrm>
+            <a:off x="763200" y="835200"/>
+            <a:ext cx="468000" cy="158400"/>
+          </a:xfrm>
+          <a:prstGeom prst="rect">
+            <a:avLst/>
+          </a:prstGeom>
+          <a:noFill/>
+        </p:spPr>
+        <p:txBody>
+          <a:bodyPr wrap="square" tIns="0" bIns="0" lIns="18000" rIns="18000">
+            <a:spAutoFit/>
+          </a:bodyPr>
+          <a:lstStyle/>
+          <a:p>
+            <a:pPr algn="ctr">
+              <a:spcBef>
+                <a:spcPts val="0"/>
+              </a:spcBef>
+              <a:spcAft>
+                <a:spcPts val="100"/>
+              </a:spcAft>
+            </a:pPr>
+            <a:r>
+              <a:rPr sz="800" b="1" i="0">
+                <a:solidFill>
+                  <a:srgbClr val="FFFFFF"/>
+                </a:solidFill>
+                <a:latin typeface="Arial"/>
+              </a:rPr>
+              <a:t>0:52</a:t>
+            </a:r>
+          </a:p>
+        </p:txBody>
+      </p:sp>
+      <p:sp>
+        <p:nvSpPr>
           <p:cNvPr id="6" name="TextBox 5"/>
           <p:cNvSpPr txBox="1"/>
           <p:nvPr/>
         </p:nvSpPr>
         <p:spPr>
           <a:xfrm>
-            <a:off x="763200" y="835200"/>
-            <a:ext cx="468000" cy="158400"/>
+            <a:off x="1303200" y="604800"/>
+            <a:ext cx="5652000" cy="655200"/>
           </a:xfrm>
           <a:prstGeom prst="rect">
             <a:avLst/>
@@ -5928,7 +5924,7 @@
           </a:bodyPr>
           <a:lstStyle/>
           <a:p>
-            <a:pPr algn="ctr">
+            <a:pPr algn="l">
               <a:spcBef>
                 <a:spcPts val="0"/>
               </a:spcBef>
@@ -5939,36 +5935,13 @@
             <a:r>
               <a:rPr sz="800" b="1" i="0">
                 <a:solidFill>
-                  <a:srgbClr val="FFFFFF"/>
-                </a:solidFill>
-                <a:latin typeface="Arial"/>
-              </a:rPr>
-              <a:t>0:52</a:t>
-            </a:r>
-          </a:p>
-        </p:txBody>
-      </p:sp>
-      <p:sp>
-        <p:nvSpPr>
-          <p:cNvPr id="7" name="TextBox 6"/>
-          <p:cNvSpPr txBox="1"/>
-          <p:nvPr/>
-        </p:nvSpPr>
-        <p:spPr>
-          <a:xfrm>
-            <a:off x="1303200" y="604800"/>
-            <a:ext cx="5652000" cy="655200"/>
-          </a:xfrm>
-          <a:prstGeom prst="rect">
-            <a:avLst/>
-          </a:prstGeom>
-          <a:noFill/>
-        </p:spPr>
-        <p:txBody>
-          <a:bodyPr wrap="square" tIns="0" bIns="0" lIns="18000" rIns="18000">
-            <a:spAutoFit/>
-          </a:bodyPr>
-          <a:lstStyle/>
+                  <a:srgbClr val="4388BC"/>
+                </a:solidFill>
+                <a:latin typeface="Arial"/>
+              </a:rPr>
+              <a:t>8 min</a:t>
+            </a:r>
+          </a:p>
           <a:p>
             <a:pPr algn="l">
               <a:spcBef>
@@ -5979,13 +5952,13 @@
               </a:spcAft>
             </a:pPr>
             <a:r>
-              <a:rPr sz="800" b="1" i="0">
-                <a:solidFill>
-                  <a:srgbClr val="4388BC"/>
-                </a:solidFill>
-                <a:latin typeface="Arial"/>
-              </a:rPr>
-              <a:t>8 min</a:t>
+              <a:rPr sz="900" b="1" i="0">
+                <a:solidFill>
+                  <a:srgbClr val="2B2B2B"/>
+                </a:solidFill>
+                <a:latin typeface="Arial"/>
+              </a:rPr>
+              <a:t>Remboursement</a:t>
             </a:r>
           </a:p>
           <a:p>
@@ -5998,31 +5971,12 @@
               </a:spcAft>
             </a:pPr>
             <a:r>
-              <a:rPr sz="900" b="1" i="0">
+              <a:rPr sz="800" b="0" i="0">
                 <a:solidFill>
                   <a:srgbClr val="2B2B2B"/>
                 </a:solidFill>
                 <a:latin typeface="Arial"/>
               </a:rPr>
-              <a:t>Remboursement</a:t>
-            </a:r>
-          </a:p>
-          <a:p>
-            <a:pPr algn="l">
-              <a:spcBef>
-                <a:spcPts val="0"/>
-              </a:spcBef>
-              <a:spcAft>
-                <a:spcPts val="100"/>
-              </a:spcAft>
-            </a:pPr>
-            <a:r>
-              <a:rPr sz="800" b="0" i="0">
-                <a:solidFill>
-                  <a:srgbClr val="2B2B2B"/>
-                </a:solidFill>
-                <a:latin typeface="Arial"/>
-              </a:rPr>
               <a:t>. Est-ce que c'est remboursé par la Sécurité sociale ?</a:t>
             </a:r>
           </a:p>
@@ -6030,7 +5984,7 @@
       </p:sp>
       <p:sp>
         <p:nvSpPr>
-          <p:cNvPr id="8" name="Rectangle 7"/>
+          <p:cNvPr id="7" name="Rectangle 6"/>
           <p:cNvSpPr/>
           <p:nvPr/>
         </p:nvSpPr>
@@ -6073,7 +6027,7 @@
       </p:sp>
       <p:sp>
         <p:nvSpPr>
-          <p:cNvPr id="9" name="Rectangle 8"/>
+          <p:cNvPr id="8" name="Rectangle 7"/>
           <p:cNvSpPr/>
           <p:nvPr/>
         </p:nvSpPr>
@@ -6114,7 +6068,7 @@
       </p:sp>
       <p:sp>
         <p:nvSpPr>
-          <p:cNvPr id="10" name="Rectangle 9"/>
+          <p:cNvPr id="9" name="Rectangle 8"/>
           <p:cNvSpPr/>
           <p:nvPr/>
         </p:nvSpPr>
@@ -6155,14 +6109,56 @@
       </p:sp>
       <p:sp>
         <p:nvSpPr>
+          <p:cNvPr id="10" name="TextBox 9"/>
+          <p:cNvSpPr txBox="1"/>
+          <p:nvPr/>
+        </p:nvSpPr>
+        <p:spPr>
+          <a:xfrm>
+            <a:off x="763200" y="1584000"/>
+            <a:ext cx="468000" cy="158400"/>
+          </a:xfrm>
+          <a:prstGeom prst="rect">
+            <a:avLst/>
+          </a:prstGeom>
+          <a:noFill/>
+        </p:spPr>
+        <p:txBody>
+          <a:bodyPr wrap="square" tIns="0" bIns="0" lIns="18000" rIns="18000">
+            <a:spAutoFit/>
+          </a:bodyPr>
+          <a:lstStyle/>
+          <a:p>
+            <a:pPr algn="ctr">
+              <a:spcBef>
+                <a:spcPts val="0"/>
+              </a:spcBef>
+              <a:spcAft>
+                <a:spcPts val="100"/>
+              </a:spcAft>
+            </a:pPr>
+            <a:r>
+              <a:rPr sz="800" b="1" i="0">
+                <a:solidFill>
+                  <a:srgbClr val="FFFFFF"/>
+                </a:solidFill>
+                <a:latin typeface="Arial"/>
+              </a:rPr>
+              <a:t>1:00</a:t>
+            </a:r>
+          </a:p>
+        </p:txBody>
+      </p:sp>
+      <p:sp>
+        <p:nvSpPr>
           <p:cNvPr id="11" name="TextBox 10"/>
           <p:cNvSpPr txBox="1"/>
           <p:nvPr/>
         </p:nvSpPr>
         <p:spPr>
           <a:xfrm>
-            <a:off x="763200" y="1584000"/>
-            <a:ext cx="468000" cy="158400"/>
+            <a:off x="1303200" y="1353600"/>
+            <a:ext cx="5652000" cy="655200"/>
           </a:xfrm>
           <a:prstGeom prst="rect">
             <a:avLst/>
@@ -6175,7 +6171,7 @@
           </a:bodyPr>
           <a:lstStyle/>
           <a:p>
-            <a:pPr algn="ctr">
+            <a:pPr algn="l">
               <a:spcBef>
                 <a:spcPts val="0"/>
               </a:spcBef>
@@ -6186,36 +6182,13 @@
             <a:r>
               <a:rPr sz="800" b="1" i="0">
                 <a:solidFill>
-                  <a:srgbClr val="FFFFFF"/>
-                </a:solidFill>
-                <a:latin typeface="Arial"/>
-              </a:rPr>
-              <a:t>1:00</a:t>
-            </a:r>
-          </a:p>
-        </p:txBody>
-      </p:sp>
-      <p:sp>
-        <p:nvSpPr>
-          <p:cNvPr id="12" name="TextBox 11"/>
-          <p:cNvSpPr txBox="1"/>
-          <p:nvPr/>
-        </p:nvSpPr>
-        <p:spPr>
-          <a:xfrm>
-            <a:off x="1303200" y="1353600"/>
-            <a:ext cx="5652000" cy="655200"/>
-          </a:xfrm>
-          <a:prstGeom prst="rect">
-            <a:avLst/>
-          </a:prstGeom>
-          <a:noFill/>
-        </p:spPr>
-        <p:txBody>
-          <a:bodyPr wrap="square" tIns="0" bIns="0" lIns="18000" rIns="18000">
-            <a:spAutoFit/>
-          </a:bodyPr>
-          <a:lstStyle/>
+                  <a:srgbClr val="187C88"/>
+                </a:solidFill>
+                <a:latin typeface="Arial"/>
+              </a:rPr>
+              <a:t>12 min</a:t>
+            </a:r>
+          </a:p>
           <a:p>
             <a:pPr algn="l">
               <a:spcBef>
@@ -6226,13 +6199,13 @@
               </a:spcAft>
             </a:pPr>
             <a:r>
-              <a:rPr sz="800" b="1" i="0">
-                <a:solidFill>
-                  <a:srgbClr val="187C88"/>
-                </a:solidFill>
-                <a:latin typeface="Arial"/>
-              </a:rPr>
-              <a:t>12 min</a:t>
+              <a:rPr sz="900" b="1" i="0">
+                <a:solidFill>
+                  <a:srgbClr val="2B2B2B"/>
+                </a:solidFill>
+                <a:latin typeface="Arial"/>
+              </a:rPr>
+              <a:t>Bonnes pratiques numériques</a:t>
             </a:r>
           </a:p>
           <a:p>
@@ -6245,31 +6218,12 @@
               </a:spcAft>
             </a:pPr>
             <a:r>
-              <a:rPr sz="900" b="1" i="0">
+              <a:rPr sz="800" b="0" i="0">
                 <a:solidFill>
                   <a:srgbClr val="2B2B2B"/>
                 </a:solidFill>
                 <a:latin typeface="Arial"/>
               </a:rPr>
-              <a:t>Bonnes pratiques numériques</a:t>
-            </a:r>
-          </a:p>
-          <a:p>
-            <a:pPr algn="l">
-              <a:spcBef>
-                <a:spcPts val="0"/>
-              </a:spcBef>
-              <a:spcAft>
-                <a:spcPts val="100"/>
-              </a:spcAft>
-            </a:pPr>
-            <a:r>
-              <a:rPr sz="800" b="0" i="0">
-                <a:solidFill>
-                  <a:srgbClr val="2B2B2B"/>
-                </a:solidFill>
-                <a:latin typeface="Arial"/>
-              </a:rPr>
               <a:t>. Comment adopter un usage éco-conscient de Doctolib ?</a:t>
             </a:r>
           </a:p>
@@ -6277,7 +6231,7 @@
       </p:sp>
       <p:sp>
         <p:nvSpPr>
-          <p:cNvPr id="13" name="Rectangle 12"/>
+          <p:cNvPr id="12" name="Rectangle 11"/>
           <p:cNvSpPr/>
           <p:nvPr/>
         </p:nvSpPr>
@@ -6320,7 +6274,7 @@
       </p:sp>
       <p:sp>
         <p:nvSpPr>
-          <p:cNvPr id="14" name="Rectangle 13"/>
+          <p:cNvPr id="13" name="Rectangle 12"/>
           <p:cNvSpPr/>
           <p:nvPr/>
         </p:nvSpPr>
@@ -6361,7 +6315,7 @@
       </p:sp>
       <p:sp>
         <p:nvSpPr>
-          <p:cNvPr id="15" name="Rectangle 14"/>
+          <p:cNvPr id="14" name="Rectangle 13"/>
           <p:cNvSpPr/>
           <p:nvPr/>
         </p:nvSpPr>
@@ -6402,14 +6356,56 @@
       </p:sp>
       <p:sp>
         <p:nvSpPr>
+          <p:cNvPr id="15" name="TextBox 14"/>
+          <p:cNvSpPr txBox="1"/>
+          <p:nvPr/>
+        </p:nvSpPr>
+        <p:spPr>
+          <a:xfrm>
+            <a:off x="763200" y="2332800"/>
+            <a:ext cx="468000" cy="158400"/>
+          </a:xfrm>
+          <a:prstGeom prst="rect">
+            <a:avLst/>
+          </a:prstGeom>
+          <a:noFill/>
+        </p:spPr>
+        <p:txBody>
+          <a:bodyPr wrap="square" tIns="0" bIns="0" lIns="18000" rIns="18000">
+            <a:spAutoFit/>
+          </a:bodyPr>
+          <a:lstStyle/>
+          <a:p>
+            <a:pPr algn="ctr">
+              <a:spcBef>
+                <a:spcPts val="0"/>
+              </a:spcBef>
+              <a:spcAft>
+                <a:spcPts val="100"/>
+              </a:spcAft>
+            </a:pPr>
+            <a:r>
+              <a:rPr sz="800" b="1" i="0">
+                <a:solidFill>
+                  <a:srgbClr val="FFFFFF"/>
+                </a:solidFill>
+                <a:latin typeface="Arial"/>
+              </a:rPr>
+              <a:t>1:12</a:t>
+            </a:r>
+          </a:p>
+        </p:txBody>
+      </p:sp>
+      <p:sp>
+        <p:nvSpPr>
           <p:cNvPr id="16" name="TextBox 15"/>
           <p:cNvSpPr txBox="1"/>
           <p:nvPr/>
         </p:nvSpPr>
         <p:spPr>
           <a:xfrm>
-            <a:off x="763200" y="2332800"/>
-            <a:ext cx="468000" cy="158400"/>
+            <a:off x="1303200" y="2102400"/>
+            <a:ext cx="5652000" cy="655200"/>
           </a:xfrm>
           <a:prstGeom prst="rect">
             <a:avLst/>
@@ -6422,7 +6418,7 @@
           </a:bodyPr>
           <a:lstStyle/>
           <a:p>
-            <a:pPr algn="ctr">
+            <a:pPr algn="l">
               <a:spcBef>
                 <a:spcPts val="0"/>
               </a:spcBef>
@@ -6433,36 +6429,13 @@
             <a:r>
               <a:rPr sz="800" b="1" i="0">
                 <a:solidFill>
-                  <a:srgbClr val="FFFFFF"/>
-                </a:solidFill>
-                <a:latin typeface="Arial"/>
-              </a:rPr>
-              <a:t>1:12</a:t>
-            </a:r>
-          </a:p>
-        </p:txBody>
-      </p:sp>
-      <p:sp>
-        <p:nvSpPr>
-          <p:cNvPr id="17" name="TextBox 16"/>
-          <p:cNvSpPr txBox="1"/>
-          <p:nvPr/>
-        </p:nvSpPr>
-        <p:spPr>
-          <a:xfrm>
-            <a:off x="1303200" y="2102400"/>
-            <a:ext cx="5652000" cy="655200"/>
-          </a:xfrm>
-          <a:prstGeom prst="rect">
-            <a:avLst/>
-          </a:prstGeom>
-          <a:noFill/>
-        </p:spPr>
-        <p:txBody>
-          <a:bodyPr wrap="square" tIns="0" bIns="0" lIns="18000" rIns="18000">
-            <a:spAutoFit/>
-          </a:bodyPr>
-          <a:lstStyle/>
+                  <a:srgbClr val="5EB3D2"/>
+                </a:solidFill>
+                <a:latin typeface="Arial"/>
+              </a:rPr>
+              <a:t>5 min</a:t>
+            </a:r>
+          </a:p>
           <a:p>
             <a:pPr algn="l">
               <a:spcBef>
@@ -6473,13 +6446,13 @@
               </a:spcAft>
             </a:pPr>
             <a:r>
-              <a:rPr sz="800" b="1" i="0">
-                <a:solidFill>
-                  <a:srgbClr val="5EB3D2"/>
-                </a:solidFill>
-                <a:latin typeface="Arial"/>
-              </a:rPr>
-              <a:t>5 min</a:t>
+              <a:rPr sz="900" b="1" i="0">
+                <a:solidFill>
+                  <a:srgbClr val="2B2B2B"/>
+                </a:solidFill>
+                <a:latin typeface="Arial"/>
+              </a:rPr>
+              <a:t>Questions fréquentes</a:t>
             </a:r>
           </a:p>
           <a:p>
@@ -6492,31 +6465,12 @@
               </a:spcAft>
             </a:pPr>
             <a:r>
-              <a:rPr sz="900" b="1" i="0">
+              <a:rPr sz="800" b="0" i="0">
                 <a:solidFill>
                   <a:srgbClr val="2B2B2B"/>
                 </a:solidFill>
                 <a:latin typeface="Arial"/>
               </a:rPr>
-              <a:t>Questions fréquentes</a:t>
-            </a:r>
-          </a:p>
-          <a:p>
-            <a:pPr algn="l">
-              <a:spcBef>
-                <a:spcPts val="0"/>
-              </a:spcBef>
-              <a:spcAft>
-                <a:spcPts val="100"/>
-              </a:spcAft>
-            </a:pPr>
-            <a:r>
-              <a:rPr sz="800" b="0" i="0">
-                <a:solidFill>
-                  <a:srgbClr val="2B2B2B"/>
-                </a:solidFill>
-                <a:latin typeface="Arial"/>
-              </a:rPr>
               <a:t>. Ce que vous nous demandez le plus souvent</a:t>
             </a:r>
           </a:p>
@@ -6524,7 +6478,7 @@
       </p:sp>
       <p:sp>
         <p:nvSpPr>
-          <p:cNvPr id="18" name="Rectangle 17"/>
+          <p:cNvPr id="17" name="Rectangle 16"/>
           <p:cNvSpPr/>
           <p:nvPr/>
         </p:nvSpPr>
@@ -6567,7 +6521,7 @@
       </p:sp>
       <p:sp>
         <p:nvSpPr>
-          <p:cNvPr id="19" name="Rectangle 18"/>
+          <p:cNvPr id="18" name="Rectangle 17"/>
           <p:cNvSpPr/>
           <p:nvPr/>
         </p:nvSpPr>
@@ -6608,7 +6562,7 @@
       </p:sp>
       <p:sp>
         <p:nvSpPr>
-          <p:cNvPr id="20" name="TextBox 19"/>
+          <p:cNvPr id="19" name="TextBox 18"/>
           <p:cNvSpPr txBox="1"/>
           <p:nvPr/>
         </p:nvSpPr>
@@ -6650,7 +6604,7 @@
       </p:sp>
       <p:sp>
         <p:nvSpPr>
-          <p:cNvPr id="21" name="Rectangle 20"/>
+          <p:cNvPr id="20" name="Rectangle 19"/>
           <p:cNvSpPr/>
           <p:nvPr/>
         </p:nvSpPr>
@@ -6691,7 +6645,7 @@
       </p:sp>
       <p:sp>
         <p:nvSpPr>
-          <p:cNvPr id="22" name="TextBox 21"/>
+          <p:cNvPr id="21" name="TextBox 20"/>
           <p:cNvSpPr txBox="1"/>
           <p:nvPr/>
         </p:nvSpPr>
@@ -6818,7 +6772,7 @@
       </p:sp>
       <p:sp>
         <p:nvSpPr>
-          <p:cNvPr id="23" name="Rectangle 22"/>
+          <p:cNvPr id="22" name="Rectangle 21"/>
           <p:cNvSpPr/>
           <p:nvPr/>
         </p:nvSpPr>
@@ -6859,7 +6813,7 @@
       </p:sp>
       <p:sp>
         <p:nvSpPr>
-          <p:cNvPr id="24" name="TextBox 23"/>
+          <p:cNvPr id="23" name="TextBox 22"/>
           <p:cNvSpPr txBox="1"/>
           <p:nvPr/>
         </p:nvSpPr>
@@ -6986,7 +6940,7 @@
       </p:sp>
       <p:sp>
         <p:nvSpPr>
-          <p:cNvPr id="25" name="Rectangle 24"/>
+          <p:cNvPr id="24" name="Rectangle 23"/>
           <p:cNvSpPr/>
           <p:nvPr/>
         </p:nvSpPr>
@@ -7027,7 +6981,7 @@
       </p:sp>
       <p:sp>
         <p:nvSpPr>
-          <p:cNvPr id="26" name="TextBox 25"/>
+          <p:cNvPr id="25" name="TextBox 24"/>
           <p:cNvSpPr txBox="1"/>
           <p:nvPr/>
         </p:nvSpPr>

--- a/assets/fiches/B10-fiche-1h30.pptx
+++ b/assets/fiches/B10-fiche-1h30.pptx
@@ -3156,7 +3156,7 @@
                 </a:solidFill>
                 <a:latin typeface="Arial"/>
               </a:rPr>
-              <a:t>Fiche Action | 1h17 | Guide d'animation — Conseillers Numériques CD47</a:t>
+              <a:t>Fiche Action | 1h33 | Guide d'animation — Conseillers Numériques CD47</a:t>
             </a:r>
           </a:p>
         </p:txBody>
@@ -6484,7 +6484,501 @@
         </p:nvSpPr>
         <p:spPr>
           <a:xfrm>
-            <a:off x="529200" y="2876400"/>
+            <a:off x="529200" y="2786400"/>
+            <a:ext cx="6498000" cy="748800"/>
+          </a:xfrm>
+          <a:prstGeom prst="rect">
+            <a:avLst/>
+          </a:prstGeom>
+          <a:solidFill>
+            <a:srgbClr val="F8F9FD"/>
+          </a:solidFill>
+          <a:ln w="6350">
+            <a:solidFill>
+              <a:srgbClr val="DDE6ED"/>
+            </a:solidFill>
+          </a:ln>
+        </p:spPr>
+        <p:style>
+          <a:lnRef idx="1">
+            <a:schemeClr val="accent1"/>
+          </a:lnRef>
+          <a:fillRef idx="3">
+            <a:schemeClr val="accent1"/>
+          </a:fillRef>
+          <a:effectRef idx="2">
+            <a:schemeClr val="accent1"/>
+          </a:effectRef>
+          <a:fontRef idx="minor">
+            <a:schemeClr val="lt1"/>
+          </a:fontRef>
+        </p:style>
+        <p:txBody>
+          <a:bodyPr rtlCol="0" anchor="ctr"/>
+          <a:lstStyle/>
+          <a:p/>
+        </p:txBody>
+      </p:sp>
+      <p:sp>
+        <p:nvSpPr>
+          <p:cNvPr id="18" name="Rectangle 17"/>
+          <p:cNvSpPr/>
+          <p:nvPr/>
+        </p:nvSpPr>
+        <p:spPr>
+          <a:xfrm>
+            <a:off x="529200" y="2786400"/>
+            <a:ext cx="198000" cy="748800"/>
+          </a:xfrm>
+          <a:prstGeom prst="rect">
+            <a:avLst/>
+          </a:prstGeom>
+          <a:solidFill>
+            <a:srgbClr val="5EB3D2"/>
+          </a:solidFill>
+          <a:ln>
+            <a:noFill/>
+          </a:ln>
+        </p:spPr>
+        <p:style>
+          <a:lnRef idx="1">
+            <a:schemeClr val="accent1"/>
+          </a:lnRef>
+          <a:fillRef idx="3">
+            <a:schemeClr val="accent1"/>
+          </a:fillRef>
+          <a:effectRef idx="2">
+            <a:schemeClr val="accent1"/>
+          </a:effectRef>
+          <a:fontRef idx="minor">
+            <a:schemeClr val="lt1"/>
+          </a:fontRef>
+        </p:style>
+        <p:txBody>
+          <a:bodyPr rtlCol="0" anchor="ctr"/>
+          <a:lstStyle/>
+          <a:p/>
+        </p:txBody>
+      </p:sp>
+      <p:sp>
+        <p:nvSpPr>
+          <p:cNvPr id="19" name="Rectangle 18"/>
+          <p:cNvSpPr/>
+          <p:nvPr/>
+        </p:nvSpPr>
+        <p:spPr>
+          <a:xfrm>
+            <a:off x="763200" y="3081600"/>
+            <a:ext cx="468000" cy="158400"/>
+          </a:xfrm>
+          <a:prstGeom prst="rect">
+            <a:avLst/>
+          </a:prstGeom>
+          <a:solidFill>
+            <a:srgbClr val="5EB3D2"/>
+          </a:solidFill>
+          <a:ln>
+            <a:noFill/>
+          </a:ln>
+        </p:spPr>
+        <p:style>
+          <a:lnRef idx="1">
+            <a:schemeClr val="accent1"/>
+          </a:lnRef>
+          <a:fillRef idx="3">
+            <a:schemeClr val="accent1"/>
+          </a:fillRef>
+          <a:effectRef idx="2">
+            <a:schemeClr val="accent1"/>
+          </a:effectRef>
+          <a:fontRef idx="minor">
+            <a:schemeClr val="lt1"/>
+          </a:fontRef>
+        </p:style>
+        <p:txBody>
+          <a:bodyPr rtlCol="0" anchor="ctr"/>
+          <a:lstStyle/>
+          <a:p/>
+        </p:txBody>
+      </p:sp>
+      <p:sp>
+        <p:nvSpPr>
+          <p:cNvPr id="20" name="TextBox 19"/>
+          <p:cNvSpPr txBox="1"/>
+          <p:nvPr/>
+        </p:nvSpPr>
+        <p:spPr>
+          <a:xfrm>
+            <a:off x="763200" y="3081600"/>
+            <a:ext cx="468000" cy="158400"/>
+          </a:xfrm>
+          <a:prstGeom prst="rect">
+            <a:avLst/>
+          </a:prstGeom>
+          <a:noFill/>
+        </p:spPr>
+        <p:txBody>
+          <a:bodyPr wrap="square" tIns="0" bIns="0" lIns="18000" rIns="18000">
+            <a:spAutoFit/>
+          </a:bodyPr>
+          <a:lstStyle/>
+          <a:p>
+            <a:pPr algn="ctr">
+              <a:spcBef>
+                <a:spcPts val="0"/>
+              </a:spcBef>
+              <a:spcAft>
+                <a:spcPts val="100"/>
+              </a:spcAft>
+            </a:pPr>
+            <a:r>
+              <a:rPr sz="800" b="1" i="0">
+                <a:solidFill>
+                  <a:srgbClr val="FFFFFF"/>
+                </a:solidFill>
+                <a:latin typeface="Arial"/>
+              </a:rPr>
+              <a:t>1:17</a:t>
+            </a:r>
+          </a:p>
+        </p:txBody>
+      </p:sp>
+      <p:sp>
+        <p:nvSpPr>
+          <p:cNvPr id="21" name="TextBox 20"/>
+          <p:cNvSpPr txBox="1"/>
+          <p:nvPr/>
+        </p:nvSpPr>
+        <p:spPr>
+          <a:xfrm>
+            <a:off x="1303200" y="2851200"/>
+            <a:ext cx="5652000" cy="655200"/>
+          </a:xfrm>
+          <a:prstGeom prst="rect">
+            <a:avLst/>
+          </a:prstGeom>
+          <a:noFill/>
+        </p:spPr>
+        <p:txBody>
+          <a:bodyPr wrap="square" tIns="0" bIns="0" lIns="18000" rIns="18000">
+            <a:spAutoFit/>
+          </a:bodyPr>
+          <a:lstStyle/>
+          <a:p>
+            <a:pPr algn="l">
+              <a:spcBef>
+                <a:spcPts val="0"/>
+              </a:spcBef>
+              <a:spcAft>
+                <a:spcPts val="100"/>
+              </a:spcAft>
+            </a:pPr>
+            <a:r>
+              <a:rPr sz="800" b="1" i="0">
+                <a:solidFill>
+                  <a:srgbClr val="5EB3D2"/>
+                </a:solidFill>
+                <a:latin typeface="Arial"/>
+              </a:rPr>
+              <a:t>8 min</a:t>
+            </a:r>
+          </a:p>
+          <a:p>
+            <a:pPr algn="l">
+              <a:spcBef>
+                <a:spcPts val="0"/>
+              </a:spcBef>
+              <a:spcAft>
+                <a:spcPts val="100"/>
+              </a:spcAft>
+            </a:pPr>
+            <a:r>
+              <a:rPr sz="900" b="1" i="0">
+                <a:solidFill>
+                  <a:srgbClr val="2B2B2B"/>
+                </a:solidFill>
+                <a:latin typeface="Arial"/>
+              </a:rPr>
+              <a:t>Offre départementale d’Inclusion Numérique</a:t>
+            </a:r>
+          </a:p>
+          <a:p>
+            <a:pPr algn="l">
+              <a:spcBef>
+                <a:spcPts val="0"/>
+              </a:spcBef>
+              <a:spcAft>
+                <a:spcPts val="100"/>
+              </a:spcAft>
+            </a:pPr>
+            <a:r>
+              <a:rPr sz="800" b="0" i="0">
+                <a:solidFill>
+                  <a:srgbClr val="2B2B2B"/>
+                </a:solidFill>
+                <a:latin typeface="Arial"/>
+              </a:rPr>
+              <a:t>. Voici les 5 offres et services dispensés par l’équipe départementale</a:t>
+            </a:r>
+          </a:p>
+        </p:txBody>
+      </p:sp>
+      <p:sp>
+        <p:nvSpPr>
+          <p:cNvPr id="22" name="Rectangle 21"/>
+          <p:cNvSpPr/>
+          <p:nvPr/>
+        </p:nvSpPr>
+        <p:spPr>
+          <a:xfrm>
+            <a:off x="529200" y="3535200"/>
+            <a:ext cx="6498000" cy="748800"/>
+          </a:xfrm>
+          <a:prstGeom prst="rect">
+            <a:avLst/>
+          </a:prstGeom>
+          <a:solidFill>
+            <a:srgbClr val="F8F9FD"/>
+          </a:solidFill>
+          <a:ln w="6350">
+            <a:solidFill>
+              <a:srgbClr val="DDE6ED"/>
+            </a:solidFill>
+          </a:ln>
+        </p:spPr>
+        <p:style>
+          <a:lnRef idx="1">
+            <a:schemeClr val="accent1"/>
+          </a:lnRef>
+          <a:fillRef idx="3">
+            <a:schemeClr val="accent1"/>
+          </a:fillRef>
+          <a:effectRef idx="2">
+            <a:schemeClr val="accent1"/>
+          </a:effectRef>
+          <a:fontRef idx="minor">
+            <a:schemeClr val="lt1"/>
+          </a:fontRef>
+        </p:style>
+        <p:txBody>
+          <a:bodyPr rtlCol="0" anchor="ctr"/>
+          <a:lstStyle/>
+          <a:p/>
+        </p:txBody>
+      </p:sp>
+      <p:sp>
+        <p:nvSpPr>
+          <p:cNvPr id="23" name="Rectangle 22"/>
+          <p:cNvSpPr/>
+          <p:nvPr/>
+        </p:nvSpPr>
+        <p:spPr>
+          <a:xfrm>
+            <a:off x="529200" y="3535200"/>
+            <a:ext cx="198000" cy="748800"/>
+          </a:xfrm>
+          <a:prstGeom prst="rect">
+            <a:avLst/>
+          </a:prstGeom>
+          <a:solidFill>
+            <a:srgbClr val="4388BC"/>
+          </a:solidFill>
+          <a:ln>
+            <a:noFill/>
+          </a:ln>
+        </p:spPr>
+        <p:style>
+          <a:lnRef idx="1">
+            <a:schemeClr val="accent1"/>
+          </a:lnRef>
+          <a:fillRef idx="3">
+            <a:schemeClr val="accent1"/>
+          </a:fillRef>
+          <a:effectRef idx="2">
+            <a:schemeClr val="accent1"/>
+          </a:effectRef>
+          <a:fontRef idx="minor">
+            <a:schemeClr val="lt1"/>
+          </a:fontRef>
+        </p:style>
+        <p:txBody>
+          <a:bodyPr rtlCol="0" anchor="ctr"/>
+          <a:lstStyle/>
+          <a:p/>
+        </p:txBody>
+      </p:sp>
+      <p:sp>
+        <p:nvSpPr>
+          <p:cNvPr id="24" name="Rectangle 23"/>
+          <p:cNvSpPr/>
+          <p:nvPr/>
+        </p:nvSpPr>
+        <p:spPr>
+          <a:xfrm>
+            <a:off x="763200" y="3830400"/>
+            <a:ext cx="468000" cy="158400"/>
+          </a:xfrm>
+          <a:prstGeom prst="rect">
+            <a:avLst/>
+          </a:prstGeom>
+          <a:solidFill>
+            <a:srgbClr val="4388BC"/>
+          </a:solidFill>
+          <a:ln>
+            <a:noFill/>
+          </a:ln>
+        </p:spPr>
+        <p:style>
+          <a:lnRef idx="1">
+            <a:schemeClr val="accent1"/>
+          </a:lnRef>
+          <a:fillRef idx="3">
+            <a:schemeClr val="accent1"/>
+          </a:fillRef>
+          <a:effectRef idx="2">
+            <a:schemeClr val="accent1"/>
+          </a:effectRef>
+          <a:fontRef idx="minor">
+            <a:schemeClr val="lt1"/>
+          </a:fontRef>
+        </p:style>
+        <p:txBody>
+          <a:bodyPr rtlCol="0" anchor="ctr"/>
+          <a:lstStyle/>
+          <a:p/>
+        </p:txBody>
+      </p:sp>
+      <p:sp>
+        <p:nvSpPr>
+          <p:cNvPr id="25" name="TextBox 24"/>
+          <p:cNvSpPr txBox="1"/>
+          <p:nvPr/>
+        </p:nvSpPr>
+        <p:spPr>
+          <a:xfrm>
+            <a:off x="763200" y="3830400"/>
+            <a:ext cx="468000" cy="158400"/>
+          </a:xfrm>
+          <a:prstGeom prst="rect">
+            <a:avLst/>
+          </a:prstGeom>
+          <a:noFill/>
+        </p:spPr>
+        <p:txBody>
+          <a:bodyPr wrap="square" tIns="0" bIns="0" lIns="18000" rIns="18000">
+            <a:spAutoFit/>
+          </a:bodyPr>
+          <a:lstStyle/>
+          <a:p>
+            <a:pPr algn="ctr">
+              <a:spcBef>
+                <a:spcPts val="0"/>
+              </a:spcBef>
+              <a:spcAft>
+                <a:spcPts val="100"/>
+              </a:spcAft>
+            </a:pPr>
+            <a:r>
+              <a:rPr sz="800" b="1" i="0">
+                <a:solidFill>
+                  <a:srgbClr val="FFFFFF"/>
+                </a:solidFill>
+                <a:latin typeface="Arial"/>
+              </a:rPr>
+              <a:t>1:25</a:t>
+            </a:r>
+          </a:p>
+        </p:txBody>
+      </p:sp>
+      <p:sp>
+        <p:nvSpPr>
+          <p:cNvPr id="26" name="TextBox 25"/>
+          <p:cNvSpPr txBox="1"/>
+          <p:nvPr/>
+        </p:nvSpPr>
+        <p:spPr>
+          <a:xfrm>
+            <a:off x="1303200" y="3600000"/>
+            <a:ext cx="5652000" cy="655200"/>
+          </a:xfrm>
+          <a:prstGeom prst="rect">
+            <a:avLst/>
+          </a:prstGeom>
+          <a:noFill/>
+        </p:spPr>
+        <p:txBody>
+          <a:bodyPr wrap="square" tIns="0" bIns="0" lIns="18000" rIns="18000">
+            <a:spAutoFit/>
+          </a:bodyPr>
+          <a:lstStyle/>
+          <a:p>
+            <a:pPr algn="l">
+              <a:spcBef>
+                <a:spcPts val="0"/>
+              </a:spcBef>
+              <a:spcAft>
+                <a:spcPts val="100"/>
+              </a:spcAft>
+            </a:pPr>
+            <a:r>
+              <a:rPr sz="800" b="1" i="0">
+                <a:solidFill>
+                  <a:srgbClr val="4388BC"/>
+                </a:solidFill>
+                <a:latin typeface="Arial"/>
+              </a:rPr>
+              <a:t>8 min</a:t>
+            </a:r>
+          </a:p>
+          <a:p>
+            <a:pPr algn="l">
+              <a:spcBef>
+                <a:spcPts val="0"/>
+              </a:spcBef>
+              <a:spcAft>
+                <a:spcPts val="100"/>
+              </a:spcAft>
+            </a:pPr>
+            <a:r>
+              <a:rPr sz="900" b="1" i="0">
+                <a:solidFill>
+                  <a:srgbClr val="2B2B2B"/>
+                </a:solidFill>
+                <a:latin typeface="Arial"/>
+              </a:rPr>
+              <a:t>Besoin d'aide ? Nous sommes là !</a:t>
+            </a:r>
+          </a:p>
+          <a:p>
+            <a:pPr algn="l">
+              <a:spcBef>
+                <a:spcPts val="0"/>
+              </a:spcBef>
+              <a:spcAft>
+                <a:spcPts val="100"/>
+              </a:spcAft>
+            </a:pPr>
+            <a:r>
+              <a:rPr sz="800" b="0" i="0">
+                <a:solidFill>
+                  <a:srgbClr val="2B2B2B"/>
+                </a:solidFill>
+                <a:latin typeface="Arial"/>
+              </a:rPr>
+              <a:t>. Pour nous joindre</a:t>
+            </a:r>
+          </a:p>
+        </p:txBody>
+      </p:sp>
+      <p:sp>
+        <p:nvSpPr>
+          <p:cNvPr id="27" name="Rectangle 26"/>
+          <p:cNvSpPr/>
+          <p:nvPr/>
+        </p:nvSpPr>
+        <p:spPr>
+          <a:xfrm>
+            <a:off x="529200" y="4374000"/>
             <a:ext cx="6498000" cy="1897199"/>
           </a:xfrm>
           <a:prstGeom prst="rect">
@@ -6521,13 +7015,13 @@
       </p:sp>
       <p:sp>
         <p:nvSpPr>
-          <p:cNvPr id="18" name="Rectangle 17"/>
+          <p:cNvPr id="28" name="Rectangle 27"/>
           <p:cNvSpPr/>
           <p:nvPr/>
         </p:nvSpPr>
         <p:spPr>
           <a:xfrm>
-            <a:off x="529200" y="2876400"/>
+            <a:off x="529200" y="4374000"/>
             <a:ext cx="6498000" cy="198000"/>
           </a:xfrm>
           <a:prstGeom prst="rect">
@@ -6562,13 +7056,13 @@
       </p:sp>
       <p:sp>
         <p:nvSpPr>
-          <p:cNvPr id="19" name="TextBox 18"/>
+          <p:cNvPr id="29" name="TextBox 28"/>
           <p:cNvSpPr txBox="1"/>
           <p:nvPr/>
         </p:nvSpPr>
         <p:spPr>
           <a:xfrm>
-            <a:off x="601200" y="2905200"/>
+            <a:off x="601200" y="4402800"/>
             <a:ext cx="6354000" cy="162000"/>
           </a:xfrm>
           <a:prstGeom prst="rect">
@@ -6604,13 +7098,13 @@
       </p:sp>
       <p:sp>
         <p:nvSpPr>
-          <p:cNvPr id="20" name="Rectangle 19"/>
+          <p:cNvPr id="30" name="Rectangle 29"/>
           <p:cNvSpPr/>
           <p:nvPr/>
         </p:nvSpPr>
         <p:spPr>
           <a:xfrm>
-            <a:off x="529200" y="3074400"/>
+            <a:off x="529200" y="4572000"/>
             <a:ext cx="6498000" cy="14400"/>
           </a:xfrm>
           <a:prstGeom prst="rect">
@@ -6645,13 +7139,13 @@
       </p:sp>
       <p:sp>
         <p:nvSpPr>
-          <p:cNvPr id="21" name="TextBox 20"/>
+          <p:cNvPr id="31" name="TextBox 30"/>
           <p:cNvSpPr txBox="1"/>
           <p:nvPr/>
         </p:nvSpPr>
         <p:spPr>
           <a:xfrm>
-            <a:off x="637200" y="3117600"/>
+            <a:off x="637200" y="4615200"/>
             <a:ext cx="6300000" cy="766800"/>
           </a:xfrm>
           <a:prstGeom prst="rect">
@@ -6699,7 +7193,7 @@
                 </a:solidFill>
                 <a:latin typeface="Arial"/>
               </a:rPr>
-              <a:t>Chapitre 4 — Numérique responsable</a:t>
+              <a:t>Chapitre 4	 — Numérique responsable</a:t>
             </a:r>
           </a:p>
           <a:p>
@@ -6772,13 +7266,13 @@
       </p:sp>
       <p:sp>
         <p:nvSpPr>
-          <p:cNvPr id="22" name="Rectangle 21"/>
+          <p:cNvPr id="32" name="Rectangle 31"/>
           <p:cNvSpPr/>
           <p:nvPr/>
         </p:nvSpPr>
         <p:spPr>
           <a:xfrm>
-            <a:off x="529200" y="3906000"/>
+            <a:off x="529200" y="5403600"/>
             <a:ext cx="6498000" cy="14400"/>
           </a:xfrm>
           <a:prstGeom prst="rect">
@@ -6813,13 +7307,13 @@
       </p:sp>
       <p:sp>
         <p:nvSpPr>
-          <p:cNvPr id="23" name="TextBox 22"/>
+          <p:cNvPr id="33" name="TextBox 32"/>
           <p:cNvSpPr txBox="1"/>
           <p:nvPr/>
         </p:nvSpPr>
         <p:spPr>
           <a:xfrm>
-            <a:off x="637200" y="3949200"/>
+            <a:off x="637200" y="5446800"/>
             <a:ext cx="6300000" cy="766800"/>
           </a:xfrm>
           <a:prstGeom prst="rect">
@@ -6914,7 +7408,7 @@
                 </a:solidFill>
                 <a:latin typeface="Arial"/>
               </a:rPr>
-              <a:t>. Vous avez maintenant toutes les clés pour utiliser Doctolib sereinement. Voici comment passer à l'action dès la fin de cet atelier :</a:t>
+              <a:t>. Vous avez maintenant toutes les clés pour utiliser Doctolib sereinement. Voici comment passer à l'action dès_x000B_la fin de cet atelier :</a:t>
             </a:r>
           </a:p>
           <a:p>
@@ -6940,7 +7434,7 @@
       </p:sp>
       <p:sp>
         <p:nvSpPr>
-          <p:cNvPr id="24" name="Rectangle 23"/>
+          <p:cNvPr id="34" name="Rectangle 33"/>
           <p:cNvSpPr/>
           <p:nvPr/>
         </p:nvSpPr>
@@ -6981,7 +7475,7 @@
       </p:sp>
       <p:sp>
         <p:nvSpPr>
-          <p:cNvPr id="25" name="TextBox 24"/>
+          <p:cNvPr id="35" name="TextBox 34"/>
           <p:cNvSpPr txBox="1"/>
           <p:nvPr/>
         </p:nvSpPr>
